--- a/material/[SeSAC_YDP_6] 04_4_Javascript.pptx
+++ b/material/[SeSAC_YDP_6] 04_4_Javascript.pptx
@@ -216,7 +216,7 @@
           <a:p>
             <a:fld id="{2EF3F159-7250-4DD4-91C2-13B35D56E1AF}" type="datetimeFigureOut">
               <a:rPr lang="ko-KR" altLang="en-US" smtClean="0"/>
-              <a:t>2024-05-27</a:t>
+              <a:t>2024-05-31</a:t>
             </a:fld>
             <a:endParaRPr lang="ko-KR" altLang="en-US"/>
           </a:p>
@@ -611,6 +611,999 @@
           <a:bodyPr/>
           <a:lstStyle/>
           <a:p>
+            <a:endParaRPr lang="ko-KR" altLang="en-US" b="0" dirty="0">
+              <a:solidFill>
+                <a:srgbClr val="CCCCCC"/>
+              </a:solidFill>
+              <a:effectLst/>
+              <a:highlight>
+                <a:srgbClr val="1F1F1F"/>
+              </a:highlight>
+              <a:latin typeface="Consolas" panose="020B0609020204030204" pitchFamily="49" charset="0"/>
+            </a:endParaRPr>
+          </a:p>
+          <a:p>
+            <a:r>
+              <a:rPr lang="en-US" altLang="ko-KR" b="0" dirty="0">
+                <a:solidFill>
+                  <a:srgbClr val="6A9955"/>
+                </a:solidFill>
+                <a:effectLst/>
+                <a:highlight>
+                  <a:srgbClr val="1F1F1F"/>
+                </a:highlight>
+                <a:latin typeface="Consolas" panose="020B0609020204030204" pitchFamily="49" charset="0"/>
+              </a:rPr>
+              <a:t>// </a:t>
+            </a:r>
+            <a:r>
+              <a:rPr lang="ko-KR" altLang="en-US" b="0" dirty="0">
+                <a:solidFill>
+                  <a:srgbClr val="6A9955"/>
+                </a:solidFill>
+                <a:effectLst/>
+                <a:highlight>
+                  <a:srgbClr val="1F1F1F"/>
+                </a:highlight>
+                <a:latin typeface="Consolas" panose="020B0609020204030204" pitchFamily="49" charset="0"/>
+              </a:rPr>
+              <a:t>배열의 각 요소에 대해 지정된 함수를 실행</a:t>
+            </a:r>
+            <a:r>
+              <a:rPr lang="en-US" altLang="ko-KR" b="0" dirty="0">
+                <a:solidFill>
+                  <a:srgbClr val="6A9955"/>
+                </a:solidFill>
+                <a:effectLst/>
+                <a:highlight>
+                  <a:srgbClr val="1F1F1F"/>
+                </a:highlight>
+                <a:latin typeface="Consolas" panose="020B0609020204030204" pitchFamily="49" charset="0"/>
+              </a:rPr>
+              <a:t>.</a:t>
+            </a:r>
+            <a:endParaRPr lang="ko-KR" altLang="en-US" b="0" dirty="0">
+              <a:solidFill>
+                <a:srgbClr val="CCCCCC"/>
+              </a:solidFill>
+              <a:effectLst/>
+              <a:highlight>
+                <a:srgbClr val="1F1F1F"/>
+              </a:highlight>
+              <a:latin typeface="Consolas" panose="020B0609020204030204" pitchFamily="49" charset="0"/>
+            </a:endParaRPr>
+          </a:p>
+          <a:p>
+            <a:br>
+              <a:rPr lang="en-US" altLang="ko-KR" b="0" i="0" dirty="0">
+                <a:solidFill>
+                  <a:srgbClr val="FFFFFF"/>
+                </a:solidFill>
+                <a:effectLst/>
+                <a:highlight>
+                  <a:srgbClr val="0D0D0D"/>
+                </a:highlight>
+                <a:latin typeface="ui-monospace"/>
+              </a:rPr>
+            </a:br>
+            <a:r>
+              <a:rPr lang="en-US" altLang="ko-KR" b="0" i="0" dirty="0" err="1">
+                <a:solidFill>
+                  <a:srgbClr val="FFFFFF"/>
+                </a:solidFill>
+                <a:effectLst/>
+                <a:highlight>
+                  <a:srgbClr val="0D0D0D"/>
+                </a:highlight>
+                <a:latin typeface="ui-monospace"/>
+              </a:rPr>
+              <a:t>arr.</a:t>
+            </a:r>
+            <a:r>
+              <a:rPr lang="en-US" altLang="ko-KR" b="0" i="0" dirty="0" err="1">
+                <a:solidFill>
+                  <a:srgbClr val="F22C3D"/>
+                </a:solidFill>
+                <a:effectLst/>
+                <a:highlight>
+                  <a:srgbClr val="0D0D0D"/>
+                </a:highlight>
+                <a:latin typeface="ui-monospace"/>
+              </a:rPr>
+              <a:t>forEach</a:t>
+            </a:r>
+            <a:r>
+              <a:rPr lang="en-US" altLang="ko-KR" b="0" i="0" dirty="0">
+                <a:solidFill>
+                  <a:srgbClr val="FFFFFF"/>
+                </a:solidFill>
+                <a:effectLst/>
+                <a:highlight>
+                  <a:srgbClr val="0D0D0D"/>
+                </a:highlight>
+                <a:latin typeface="ui-monospace"/>
+              </a:rPr>
+              <a:t>(</a:t>
+            </a:r>
+            <a:r>
+              <a:rPr lang="en-US" altLang="ko-KR" b="0" i="0" dirty="0">
+                <a:solidFill>
+                  <a:srgbClr val="2E95D3"/>
+                </a:solidFill>
+                <a:effectLst/>
+                <a:highlight>
+                  <a:srgbClr val="0D0D0D"/>
+                </a:highlight>
+                <a:latin typeface="ui-monospace"/>
+              </a:rPr>
+              <a:t>function</a:t>
+            </a:r>
+            <a:r>
+              <a:rPr lang="en-US" altLang="ko-KR" b="0" i="0" dirty="0">
+                <a:solidFill>
+                  <a:srgbClr val="FFFFFF"/>
+                </a:solidFill>
+                <a:effectLst/>
+                <a:highlight>
+                  <a:srgbClr val="0D0D0D"/>
+                </a:highlight>
+                <a:latin typeface="ui-monospace"/>
+              </a:rPr>
+              <a:t> </a:t>
+            </a:r>
+            <a:r>
+              <a:rPr lang="en-US" altLang="ko-KR" b="0" i="0" dirty="0">
+                <a:solidFill>
+                  <a:srgbClr val="F22C3D"/>
+                </a:solidFill>
+                <a:effectLst/>
+                <a:highlight>
+                  <a:srgbClr val="0D0D0D"/>
+                </a:highlight>
+                <a:latin typeface="ui-monospace"/>
+              </a:rPr>
+              <a:t>callback</a:t>
+            </a:r>
+            <a:r>
+              <a:rPr lang="en-US" altLang="ko-KR" b="0" i="0" dirty="0">
+                <a:solidFill>
+                  <a:srgbClr val="FFFFFF"/>
+                </a:solidFill>
+                <a:effectLst/>
+                <a:highlight>
+                  <a:srgbClr val="0D0D0D"/>
+                </a:highlight>
+                <a:latin typeface="ui-monospace"/>
+              </a:rPr>
+              <a:t>(</a:t>
+            </a:r>
+            <a:r>
+              <a:rPr lang="en-US" altLang="ko-KR" b="0" i="0" dirty="0" err="1">
+                <a:solidFill>
+                  <a:srgbClr val="FFFFFF"/>
+                </a:solidFill>
+                <a:effectLst/>
+                <a:highlight>
+                  <a:srgbClr val="0D0D0D"/>
+                </a:highlight>
+                <a:latin typeface="ui-monospace"/>
+              </a:rPr>
+              <a:t>currentValue</a:t>
+            </a:r>
+            <a:r>
+              <a:rPr lang="en-US" altLang="ko-KR" b="0" i="0" dirty="0">
+                <a:solidFill>
+                  <a:srgbClr val="FFFFFF"/>
+                </a:solidFill>
+                <a:effectLst/>
+                <a:highlight>
+                  <a:srgbClr val="0D0D0D"/>
+                </a:highlight>
+                <a:latin typeface="ui-monospace"/>
+              </a:rPr>
+              <a:t>, index, array) { </a:t>
+            </a:r>
+            <a:r>
+              <a:rPr lang="en-US" altLang="ko-KR" b="0" i="0" dirty="0">
+                <a:effectLst/>
+                <a:highlight>
+                  <a:srgbClr val="0D0D0D"/>
+                </a:highlight>
+                <a:latin typeface="ui-monospace"/>
+              </a:rPr>
+              <a:t>/</a:t>
+            </a:r>
+          </a:p>
+          <a:p>
+            <a:r>
+              <a:rPr lang="en-US" altLang="ko-KR" b="0" i="0" dirty="0">
+                <a:effectLst/>
+                <a:highlight>
+                  <a:srgbClr val="0D0D0D"/>
+                </a:highlight>
+                <a:latin typeface="ui-monospace"/>
+              </a:rPr>
+              <a:t>/ </a:t>
+            </a:r>
+            <a:r>
+              <a:rPr lang="ko-KR" altLang="en-US" b="0" i="0" dirty="0">
+                <a:effectLst/>
+                <a:highlight>
+                  <a:srgbClr val="0D0D0D"/>
+                </a:highlight>
+                <a:latin typeface="ui-monospace"/>
+              </a:rPr>
+              <a:t>요소를 처리하는 코드</a:t>
+            </a:r>
+            <a:r>
+              <a:rPr lang="ko-KR" altLang="en-US" b="0" i="0" dirty="0">
+                <a:solidFill>
+                  <a:srgbClr val="FFFFFF"/>
+                </a:solidFill>
+                <a:effectLst/>
+                <a:highlight>
+                  <a:srgbClr val="0D0D0D"/>
+                </a:highlight>
+                <a:latin typeface="ui-monospace"/>
+              </a:rPr>
+              <a:t> </a:t>
+            </a:r>
+            <a:endParaRPr lang="en-US" altLang="ko-KR" b="0" i="0" dirty="0">
+              <a:solidFill>
+                <a:srgbClr val="FFFFFF"/>
+              </a:solidFill>
+              <a:effectLst/>
+              <a:highlight>
+                <a:srgbClr val="0D0D0D"/>
+              </a:highlight>
+              <a:latin typeface="ui-monospace"/>
+            </a:endParaRPr>
+          </a:p>
+          <a:p>
+            <a:pPr algn="l">
+              <a:buFont typeface="Arial" panose="020B0604020202020204" pitchFamily="34" charset="0"/>
+              <a:buChar char="•"/>
+            </a:pPr>
+            <a:r>
+              <a:rPr lang="en-US" altLang="ko-KR" b="0" i="0" dirty="0">
+                <a:solidFill>
+                  <a:srgbClr val="FFFFFF"/>
+                </a:solidFill>
+                <a:effectLst/>
+                <a:highlight>
+                  <a:srgbClr val="0D0D0D"/>
+                </a:highlight>
+                <a:latin typeface="ui-monospace"/>
+              </a:rPr>
+              <a:t>}, </a:t>
+            </a:r>
+            <a:r>
+              <a:rPr lang="en-US" altLang="ko-KR" b="0" i="0" dirty="0" err="1">
+                <a:solidFill>
+                  <a:srgbClr val="FFFFFF"/>
+                </a:solidFill>
+                <a:effectLst/>
+                <a:highlight>
+                  <a:srgbClr val="0D0D0D"/>
+                </a:highlight>
+                <a:latin typeface="ui-monospace"/>
+              </a:rPr>
+              <a:t>thisArg</a:t>
+            </a:r>
+            <a:r>
+              <a:rPr lang="en-US" altLang="ko-KR" b="0" i="0" dirty="0">
+                <a:solidFill>
+                  <a:srgbClr val="FFFFFF"/>
+                </a:solidFill>
+                <a:effectLst/>
+                <a:highlight>
+                  <a:srgbClr val="0D0D0D"/>
+                </a:highlight>
+                <a:latin typeface="ui-monospace"/>
+              </a:rPr>
+              <a:t>);</a:t>
+            </a:r>
+            <a:br>
+              <a:rPr lang="en-US" altLang="ko-KR" b="0" i="0" dirty="0">
+                <a:solidFill>
+                  <a:srgbClr val="FFFFFF"/>
+                </a:solidFill>
+                <a:effectLst/>
+                <a:highlight>
+                  <a:srgbClr val="0D0D0D"/>
+                </a:highlight>
+                <a:latin typeface="ui-monospace"/>
+              </a:rPr>
+            </a:br>
+            <a:br>
+              <a:rPr lang="en-US" altLang="ko-KR" b="0" i="0" dirty="0">
+                <a:solidFill>
+                  <a:srgbClr val="FFFFFF"/>
+                </a:solidFill>
+                <a:effectLst/>
+                <a:highlight>
+                  <a:srgbClr val="0D0D0D"/>
+                </a:highlight>
+                <a:latin typeface="ui-monospace"/>
+              </a:rPr>
+            </a:br>
+            <a:r>
+              <a:rPr lang="en-US" altLang="ko-KR" b="0" i="0" dirty="0">
+                <a:solidFill>
+                  <a:srgbClr val="0D0D0D"/>
+                </a:solidFill>
+                <a:effectLst/>
+                <a:highlight>
+                  <a:srgbClr val="FFFFFF"/>
+                </a:highlight>
+                <a:latin typeface="ui-sans-serif"/>
+              </a:rPr>
+              <a:t>callback: </a:t>
+            </a:r>
+            <a:r>
+              <a:rPr lang="ko-KR" altLang="en-US" b="0" i="0" dirty="0">
+                <a:solidFill>
+                  <a:srgbClr val="0D0D0D"/>
+                </a:solidFill>
+                <a:effectLst/>
+                <a:highlight>
+                  <a:srgbClr val="FFFFFF"/>
+                </a:highlight>
+                <a:latin typeface="ui-sans-serif"/>
+              </a:rPr>
+              <a:t>각 요소에 대해 실행할 함수를 지정합니다</a:t>
+            </a:r>
+            <a:r>
+              <a:rPr lang="en-US" altLang="ko-KR" b="0" i="0" dirty="0">
+                <a:solidFill>
+                  <a:srgbClr val="0D0D0D"/>
+                </a:solidFill>
+                <a:effectLst/>
+                <a:highlight>
+                  <a:srgbClr val="FFFFFF"/>
+                </a:highlight>
+                <a:latin typeface="ui-sans-serif"/>
+              </a:rPr>
+              <a:t>. </a:t>
+            </a:r>
+            <a:r>
+              <a:rPr lang="ko-KR" altLang="en-US" b="0" i="0" dirty="0">
+                <a:solidFill>
+                  <a:srgbClr val="0D0D0D"/>
+                </a:solidFill>
+                <a:effectLst/>
+                <a:highlight>
+                  <a:srgbClr val="FFFFFF"/>
+                </a:highlight>
+                <a:latin typeface="ui-sans-serif"/>
+              </a:rPr>
+              <a:t>이 함수는 세 가지 매개변수를 받습니다</a:t>
+            </a:r>
+            <a:r>
+              <a:rPr lang="en-US" altLang="ko-KR" b="0" i="0" dirty="0">
+                <a:solidFill>
+                  <a:srgbClr val="0D0D0D"/>
+                </a:solidFill>
+                <a:effectLst/>
+                <a:highlight>
+                  <a:srgbClr val="FFFFFF"/>
+                </a:highlight>
+                <a:latin typeface="ui-sans-serif"/>
+              </a:rPr>
+              <a:t>.</a:t>
+            </a:r>
+          </a:p>
+          <a:p>
+            <a:pPr marL="742950" lvl="1" indent="-285750" algn="l">
+              <a:buFont typeface="Arial" panose="020B0604020202020204" pitchFamily="34" charset="0"/>
+              <a:buChar char="•"/>
+            </a:pPr>
+            <a:r>
+              <a:rPr lang="en-US" altLang="ko-KR" b="0" i="0" dirty="0" err="1">
+                <a:solidFill>
+                  <a:srgbClr val="0D0D0D"/>
+                </a:solidFill>
+                <a:effectLst/>
+                <a:highlight>
+                  <a:srgbClr val="FFFFFF"/>
+                </a:highlight>
+                <a:latin typeface="ui-sans-serif"/>
+              </a:rPr>
+              <a:t>currentValue</a:t>
+            </a:r>
+            <a:r>
+              <a:rPr lang="en-US" altLang="ko-KR" b="0" i="0" dirty="0">
+                <a:solidFill>
+                  <a:srgbClr val="0D0D0D"/>
+                </a:solidFill>
+                <a:effectLst/>
+                <a:highlight>
+                  <a:srgbClr val="FFFFFF"/>
+                </a:highlight>
+                <a:latin typeface="ui-sans-serif"/>
+              </a:rPr>
+              <a:t>: </a:t>
+            </a:r>
+            <a:r>
+              <a:rPr lang="ko-KR" altLang="en-US" b="0" i="0" dirty="0">
+                <a:solidFill>
+                  <a:srgbClr val="0D0D0D"/>
+                </a:solidFill>
+                <a:effectLst/>
+                <a:highlight>
+                  <a:srgbClr val="FFFFFF"/>
+                </a:highlight>
+                <a:latin typeface="ui-sans-serif"/>
+              </a:rPr>
+              <a:t>현재 처리 중인 요소의 값입니다</a:t>
+            </a:r>
+            <a:r>
+              <a:rPr lang="en-US" altLang="ko-KR" b="0" i="0" dirty="0">
+                <a:solidFill>
+                  <a:srgbClr val="0D0D0D"/>
+                </a:solidFill>
+                <a:effectLst/>
+                <a:highlight>
+                  <a:srgbClr val="FFFFFF"/>
+                </a:highlight>
+                <a:latin typeface="ui-sans-serif"/>
+              </a:rPr>
+              <a:t>.</a:t>
+            </a:r>
+          </a:p>
+          <a:p>
+            <a:pPr marL="742950" lvl="1" indent="-285750" algn="l">
+              <a:buFont typeface="Arial" panose="020B0604020202020204" pitchFamily="34" charset="0"/>
+              <a:buChar char="•"/>
+            </a:pPr>
+            <a:r>
+              <a:rPr lang="en-US" altLang="ko-KR" b="0" i="0" dirty="0">
+                <a:solidFill>
+                  <a:srgbClr val="0D0D0D"/>
+                </a:solidFill>
+                <a:effectLst/>
+                <a:highlight>
+                  <a:srgbClr val="FFFFFF"/>
+                </a:highlight>
+                <a:latin typeface="ui-sans-serif"/>
+              </a:rPr>
+              <a:t>index (</a:t>
+            </a:r>
+            <a:r>
+              <a:rPr lang="ko-KR" altLang="en-US" b="0" i="0" dirty="0">
+                <a:solidFill>
+                  <a:srgbClr val="0D0D0D"/>
+                </a:solidFill>
+                <a:effectLst/>
+                <a:highlight>
+                  <a:srgbClr val="FFFFFF"/>
+                </a:highlight>
+                <a:latin typeface="ui-sans-serif"/>
+              </a:rPr>
+              <a:t>선택적</a:t>
+            </a:r>
+            <a:r>
+              <a:rPr lang="en-US" altLang="ko-KR" b="0" i="0" dirty="0">
+                <a:solidFill>
+                  <a:srgbClr val="0D0D0D"/>
+                </a:solidFill>
+                <a:effectLst/>
+                <a:highlight>
+                  <a:srgbClr val="FFFFFF"/>
+                </a:highlight>
+                <a:latin typeface="ui-sans-serif"/>
+              </a:rPr>
+              <a:t>): </a:t>
+            </a:r>
+            <a:r>
+              <a:rPr lang="ko-KR" altLang="en-US" b="0" i="0" dirty="0">
+                <a:solidFill>
+                  <a:srgbClr val="0D0D0D"/>
+                </a:solidFill>
+                <a:effectLst/>
+                <a:highlight>
+                  <a:srgbClr val="FFFFFF"/>
+                </a:highlight>
+                <a:latin typeface="ui-sans-serif"/>
+              </a:rPr>
+              <a:t>현재 처리 중인 요소의 인덱스입니다</a:t>
+            </a:r>
+            <a:r>
+              <a:rPr lang="en-US" altLang="ko-KR" b="0" i="0" dirty="0">
+                <a:solidFill>
+                  <a:srgbClr val="0D0D0D"/>
+                </a:solidFill>
+                <a:effectLst/>
+                <a:highlight>
+                  <a:srgbClr val="FFFFFF"/>
+                </a:highlight>
+                <a:latin typeface="ui-sans-serif"/>
+              </a:rPr>
+              <a:t>.</a:t>
+            </a:r>
+          </a:p>
+          <a:p>
+            <a:pPr marL="742950" lvl="1" indent="-285750" algn="l">
+              <a:buFont typeface="Arial" panose="020B0604020202020204" pitchFamily="34" charset="0"/>
+              <a:buChar char="•"/>
+            </a:pPr>
+            <a:r>
+              <a:rPr lang="en-US" altLang="ko-KR" b="0" i="0" dirty="0">
+                <a:solidFill>
+                  <a:srgbClr val="0D0D0D"/>
+                </a:solidFill>
+                <a:effectLst/>
+                <a:highlight>
+                  <a:srgbClr val="FFFFFF"/>
+                </a:highlight>
+                <a:latin typeface="ui-sans-serif"/>
+              </a:rPr>
+              <a:t>array (</a:t>
+            </a:r>
+            <a:r>
+              <a:rPr lang="ko-KR" altLang="en-US" b="0" i="0" dirty="0">
+                <a:solidFill>
+                  <a:srgbClr val="0D0D0D"/>
+                </a:solidFill>
+                <a:effectLst/>
+                <a:highlight>
+                  <a:srgbClr val="FFFFFF"/>
+                </a:highlight>
+                <a:latin typeface="ui-sans-serif"/>
+              </a:rPr>
+              <a:t>선택적</a:t>
+            </a:r>
+            <a:r>
+              <a:rPr lang="en-US" altLang="ko-KR" b="0" i="0" dirty="0">
+                <a:solidFill>
+                  <a:srgbClr val="0D0D0D"/>
+                </a:solidFill>
+                <a:effectLst/>
+                <a:highlight>
+                  <a:srgbClr val="FFFFFF"/>
+                </a:highlight>
+                <a:latin typeface="ui-sans-serif"/>
+              </a:rPr>
+              <a:t>): </a:t>
+            </a:r>
+            <a:r>
+              <a:rPr lang="en-US" altLang="ko-KR" b="0" i="0" dirty="0" err="1">
+                <a:solidFill>
+                  <a:srgbClr val="0D0D0D"/>
+                </a:solidFill>
+                <a:effectLst/>
+                <a:highlight>
+                  <a:srgbClr val="FFFFFF"/>
+                </a:highlight>
+                <a:latin typeface="ui-sans-serif"/>
+              </a:rPr>
+              <a:t>forEach</a:t>
+            </a:r>
+            <a:r>
+              <a:rPr lang="en-US" altLang="ko-KR" b="0" i="0" dirty="0">
+                <a:solidFill>
+                  <a:srgbClr val="0D0D0D"/>
+                </a:solidFill>
+                <a:effectLst/>
+                <a:highlight>
+                  <a:srgbClr val="FFFFFF"/>
+                </a:highlight>
+                <a:latin typeface="ui-sans-serif"/>
+              </a:rPr>
+              <a:t>()</a:t>
+            </a:r>
+            <a:r>
+              <a:rPr lang="ko-KR" altLang="en-US" b="0" i="0" dirty="0">
+                <a:solidFill>
+                  <a:srgbClr val="0D0D0D"/>
+                </a:solidFill>
+                <a:effectLst/>
+                <a:highlight>
+                  <a:srgbClr val="FFFFFF"/>
+                </a:highlight>
+                <a:latin typeface="ui-sans-serif"/>
+              </a:rPr>
+              <a:t>를 호출한 배열입니다</a:t>
+            </a:r>
+            <a:r>
+              <a:rPr lang="en-US" altLang="ko-KR" b="0" i="0" dirty="0">
+                <a:solidFill>
+                  <a:srgbClr val="0D0D0D"/>
+                </a:solidFill>
+                <a:effectLst/>
+                <a:highlight>
+                  <a:srgbClr val="FFFFFF"/>
+                </a:highlight>
+                <a:latin typeface="ui-sans-serif"/>
+              </a:rPr>
+              <a:t>.</a:t>
+            </a:r>
+          </a:p>
+          <a:p>
+            <a:pPr algn="l">
+              <a:buFont typeface="Arial" panose="020B0604020202020204" pitchFamily="34" charset="0"/>
+              <a:buChar char="•"/>
+            </a:pPr>
+            <a:r>
+              <a:rPr lang="en-US" altLang="ko-KR" b="0" i="0" dirty="0" err="1">
+                <a:solidFill>
+                  <a:srgbClr val="0D0D0D"/>
+                </a:solidFill>
+                <a:effectLst/>
+                <a:highlight>
+                  <a:srgbClr val="FFFFFF"/>
+                </a:highlight>
+                <a:latin typeface="ui-sans-serif"/>
+              </a:rPr>
+              <a:t>thisArg</a:t>
+            </a:r>
+            <a:r>
+              <a:rPr lang="en-US" altLang="ko-KR" b="0" i="0" dirty="0">
+                <a:solidFill>
+                  <a:srgbClr val="0D0D0D"/>
+                </a:solidFill>
+                <a:effectLst/>
+                <a:highlight>
+                  <a:srgbClr val="FFFFFF"/>
+                </a:highlight>
+                <a:latin typeface="ui-sans-serif"/>
+              </a:rPr>
+              <a:t> (</a:t>
+            </a:r>
+            <a:r>
+              <a:rPr lang="ko-KR" altLang="en-US" b="0" i="0" dirty="0">
+                <a:solidFill>
+                  <a:srgbClr val="0D0D0D"/>
+                </a:solidFill>
+                <a:effectLst/>
+                <a:highlight>
+                  <a:srgbClr val="FFFFFF"/>
+                </a:highlight>
+                <a:latin typeface="ui-sans-serif"/>
+              </a:rPr>
+              <a:t>선택적</a:t>
+            </a:r>
+            <a:r>
+              <a:rPr lang="en-US" altLang="ko-KR" b="0" i="0" dirty="0">
+                <a:solidFill>
+                  <a:srgbClr val="0D0D0D"/>
+                </a:solidFill>
+                <a:effectLst/>
+                <a:highlight>
+                  <a:srgbClr val="FFFFFF"/>
+                </a:highlight>
+                <a:latin typeface="ui-sans-serif"/>
+              </a:rPr>
+              <a:t>): </a:t>
+            </a:r>
+            <a:r>
+              <a:rPr lang="ko-KR" altLang="en-US" b="0" i="0" dirty="0" err="1">
+                <a:solidFill>
+                  <a:srgbClr val="0D0D0D"/>
+                </a:solidFill>
+                <a:effectLst/>
+                <a:highlight>
+                  <a:srgbClr val="FFFFFF"/>
+                </a:highlight>
+                <a:latin typeface="ui-sans-serif"/>
+              </a:rPr>
+              <a:t>콜백</a:t>
+            </a:r>
+            <a:r>
+              <a:rPr lang="ko-KR" altLang="en-US" b="0" i="0" dirty="0">
+                <a:solidFill>
+                  <a:srgbClr val="0D0D0D"/>
+                </a:solidFill>
+                <a:effectLst/>
+                <a:highlight>
+                  <a:srgbClr val="FFFFFF"/>
+                </a:highlight>
+                <a:latin typeface="ui-sans-serif"/>
+              </a:rPr>
+              <a:t> 함수 내에서 </a:t>
+            </a:r>
+            <a:r>
+              <a:rPr lang="en-US" altLang="ko-KR" b="0" i="0" dirty="0">
+                <a:solidFill>
+                  <a:srgbClr val="0D0D0D"/>
+                </a:solidFill>
+                <a:effectLst/>
+                <a:highlight>
+                  <a:srgbClr val="FFFFFF"/>
+                </a:highlight>
+                <a:latin typeface="ui-sans-serif"/>
+              </a:rPr>
+              <a:t>this</a:t>
+            </a:r>
+            <a:r>
+              <a:rPr lang="ko-KR" altLang="en-US" b="0" i="0" dirty="0">
+                <a:solidFill>
+                  <a:srgbClr val="0D0D0D"/>
+                </a:solidFill>
+                <a:effectLst/>
+                <a:highlight>
+                  <a:srgbClr val="FFFFFF"/>
+                </a:highlight>
+                <a:latin typeface="ui-sans-serif"/>
+              </a:rPr>
+              <a:t>로 사용할 값입니다</a:t>
+            </a:r>
+            <a:r>
+              <a:rPr lang="en-US" altLang="ko-KR" b="0" i="0" dirty="0">
+                <a:solidFill>
+                  <a:srgbClr val="0D0D0D"/>
+                </a:solidFill>
+                <a:effectLst/>
+                <a:highlight>
+                  <a:srgbClr val="FFFFFF"/>
+                </a:highlight>
+                <a:latin typeface="ui-sans-serif"/>
+              </a:rPr>
+              <a:t>.</a:t>
+            </a:r>
+          </a:p>
+          <a:p>
+            <a:endParaRPr lang="ko-KR" altLang="en-US" dirty="0"/>
+          </a:p>
+        </p:txBody>
+      </p:sp>
+      <p:sp>
+        <p:nvSpPr>
+          <p:cNvPr id="4" name="슬라이드 번호 개체 틀 3"/>
+          <p:cNvSpPr>
+            <a:spLocks noGrp="1"/>
+          </p:cNvSpPr>
+          <p:nvPr>
+            <p:ph type="sldNum" sz="quarter" idx="5"/>
+          </p:nvPr>
+        </p:nvSpPr>
+        <p:spPr/>
+        <p:txBody>
+          <a:bodyPr/>
+          <a:lstStyle/>
+          <a:p>
+            <a:fld id="{C09E5BFC-1559-42F1-8940-AB342D56BF02}" type="slidenum">
+              <a:rPr lang="ko-KR" altLang="en-US" smtClean="0"/>
+              <a:t>14</a:t>
+            </a:fld>
+            <a:endParaRPr lang="ko-KR" altLang="en-US"/>
+          </a:p>
+        </p:txBody>
+      </p:sp>
+    </p:spTree>
+    <p:extLst>
+      <p:ext uri="{BB962C8B-B14F-4D97-AF65-F5344CB8AC3E}">
+        <p14:creationId xmlns:p14="http://schemas.microsoft.com/office/powerpoint/2010/main" val="4037604644"/>
+      </p:ext>
+    </p:extLst>
+  </p:cSld>
+  <p:clrMapOvr>
+    <a:masterClrMapping/>
+  </p:clrMapOvr>
+</p:notes>
+</file>
+
+<file path=ppt/notesSlides/notesSlide11.xml><?xml version="1.0" encoding="utf-8"?>
+<p:notes xmlns:a="http://schemas.openxmlformats.org/drawingml/2006/main" xmlns:r="http://schemas.openxmlformats.org/officeDocument/2006/relationships" xmlns:p="http://schemas.openxmlformats.org/presentationml/2006/main">
+  <p:cSld>
+    <p:spTree>
+      <p:nvGrpSpPr>
+        <p:cNvPr id="1" name=""/>
+        <p:cNvGrpSpPr/>
+        <p:nvPr/>
+      </p:nvGrpSpPr>
+      <p:grpSpPr>
+        <a:xfrm>
+          <a:off x="0" y="0"/>
+          <a:ext cx="0" cy="0"/>
+          <a:chOff x="0" y="0"/>
+          <a:chExt cx="0" cy="0"/>
+        </a:xfrm>
+      </p:grpSpPr>
+      <p:sp>
+        <p:nvSpPr>
+          <p:cNvPr id="2" name="슬라이드 이미지 개체 틀 1"/>
+          <p:cNvSpPr>
+            <a:spLocks noGrp="1" noRot="1" noChangeAspect="1"/>
+          </p:cNvSpPr>
+          <p:nvPr>
+            <p:ph type="sldImg"/>
+          </p:nvPr>
+        </p:nvSpPr>
+        <p:spPr/>
+      </p:sp>
+      <p:sp>
+        <p:nvSpPr>
+          <p:cNvPr id="3" name="슬라이드 노트 개체 틀 2"/>
+          <p:cNvSpPr>
+            <a:spLocks noGrp="1"/>
+          </p:cNvSpPr>
+          <p:nvPr>
+            <p:ph type="body" idx="1"/>
+          </p:nvPr>
+        </p:nvSpPr>
+        <p:spPr/>
+        <p:txBody>
+          <a:bodyPr/>
+          <a:lstStyle/>
+          <a:p>
+            <a:r>
+              <a:rPr lang="en-US" altLang="ko-KR" dirty="0"/>
+              <a:t>3</a:t>
+            </a:r>
+            <a:r>
+              <a:rPr lang="ko-KR" altLang="en-US" dirty="0"/>
+              <a:t> 가지 방법</a:t>
+            </a:r>
+            <a:r>
+              <a:rPr lang="en-US" altLang="ko-KR" dirty="0"/>
+              <a:t>.</a:t>
+            </a:r>
+            <a:br>
+              <a:rPr lang="en-US" altLang="ko-KR" dirty="0"/>
+            </a:br>
+            <a:r>
+              <a:rPr lang="ko-KR" altLang="en-US" dirty="0"/>
+              <a:t>한번 보시고 나중에 해봐라</a:t>
+            </a:r>
+            <a:r>
+              <a:rPr lang="en-US" altLang="ko-KR" dirty="0"/>
+              <a:t>. </a:t>
+            </a:r>
+            <a:r>
+              <a:rPr lang="ko-KR" altLang="en-US" dirty="0"/>
+              <a:t>실습용</a:t>
+            </a:r>
+            <a:endParaRPr lang="en-US" altLang="ko-KR" dirty="0"/>
+          </a:p>
+          <a:p>
+            <a:endParaRPr lang="ko-KR" altLang="en-US" dirty="0"/>
+          </a:p>
+        </p:txBody>
+      </p:sp>
+      <p:sp>
+        <p:nvSpPr>
+          <p:cNvPr id="4" name="슬라이드 번호 개체 틀 3"/>
+          <p:cNvSpPr>
+            <a:spLocks noGrp="1"/>
+          </p:cNvSpPr>
+          <p:nvPr>
+            <p:ph type="sldNum" sz="quarter" idx="5"/>
+          </p:nvPr>
+        </p:nvSpPr>
+        <p:spPr/>
+        <p:txBody>
+          <a:bodyPr/>
+          <a:lstStyle/>
+          <a:p>
+            <a:fld id="{C09E5BFC-1559-42F1-8940-AB342D56BF02}" type="slidenum">
+              <a:rPr lang="ko-KR" altLang="en-US" smtClean="0"/>
+              <a:t>15</a:t>
+            </a:fld>
+            <a:endParaRPr lang="ko-KR" altLang="en-US"/>
+          </a:p>
+        </p:txBody>
+      </p:sp>
+    </p:spTree>
+    <p:extLst>
+      <p:ext uri="{BB962C8B-B14F-4D97-AF65-F5344CB8AC3E}">
+        <p14:creationId xmlns:p14="http://schemas.microsoft.com/office/powerpoint/2010/main" val="1074702357"/>
+      </p:ext>
+    </p:extLst>
+  </p:cSld>
+  <p:clrMapOvr>
+    <a:masterClrMapping/>
+  </p:clrMapOvr>
+</p:notes>
+</file>
+
+<file path=ppt/notesSlides/notesSlide12.xml><?xml version="1.0" encoding="utf-8"?>
+<p:notes xmlns:a="http://schemas.openxmlformats.org/drawingml/2006/main" xmlns:r="http://schemas.openxmlformats.org/officeDocument/2006/relationships" xmlns:p="http://schemas.openxmlformats.org/presentationml/2006/main">
+  <p:cSld>
+    <p:spTree>
+      <p:nvGrpSpPr>
+        <p:cNvPr id="1" name=""/>
+        <p:cNvGrpSpPr/>
+        <p:nvPr/>
+      </p:nvGrpSpPr>
+      <p:grpSpPr>
+        <a:xfrm>
+          <a:off x="0" y="0"/>
+          <a:ext cx="0" cy="0"/>
+          <a:chOff x="0" y="0"/>
+          <a:chExt cx="0" cy="0"/>
+        </a:xfrm>
+      </p:grpSpPr>
+      <p:sp>
+        <p:nvSpPr>
+          <p:cNvPr id="2" name="슬라이드 이미지 개체 틀 1"/>
+          <p:cNvSpPr>
+            <a:spLocks noGrp="1" noRot="1" noChangeAspect="1"/>
+          </p:cNvSpPr>
+          <p:nvPr>
+            <p:ph type="sldImg"/>
+          </p:nvPr>
+        </p:nvSpPr>
+        <p:spPr/>
+      </p:sp>
+      <p:sp>
+        <p:nvSpPr>
+          <p:cNvPr id="3" name="슬라이드 노트 개체 틀 2"/>
+          <p:cNvSpPr>
+            <a:spLocks noGrp="1"/>
+          </p:cNvSpPr>
+          <p:nvPr>
+            <p:ph type="body" idx="1"/>
+          </p:nvPr>
+        </p:nvSpPr>
+        <p:spPr/>
+        <p:txBody>
+          <a:bodyPr/>
+          <a:lstStyle/>
+          <a:p>
+            <a:r>
+              <a:rPr lang="en-US" altLang="ko-KR" b="0" dirty="0">
+                <a:solidFill>
+                  <a:srgbClr val="6A9955"/>
+                </a:solidFill>
+                <a:effectLst/>
+                <a:highlight>
+                  <a:srgbClr val="1F1F1F"/>
+                </a:highlight>
+                <a:latin typeface="Consolas" panose="020B0609020204030204" pitchFamily="49" charset="0"/>
+              </a:rPr>
+              <a:t>// - </a:t>
+            </a:r>
+            <a:r>
+              <a:rPr lang="ko-KR" altLang="en-US" b="0" dirty="0">
+                <a:solidFill>
+                  <a:srgbClr val="6A9955"/>
+                </a:solidFill>
+                <a:effectLst/>
+                <a:highlight>
+                  <a:srgbClr val="1F1F1F"/>
+                </a:highlight>
+                <a:latin typeface="Consolas" panose="020B0609020204030204" pitchFamily="49" charset="0"/>
+              </a:rPr>
+              <a:t>조건에 따라 요소를 변형하거나 선택</a:t>
+            </a:r>
+            <a:r>
+              <a:rPr lang="en-US" altLang="ko-KR" b="0" dirty="0">
+                <a:solidFill>
+                  <a:srgbClr val="6A9955"/>
+                </a:solidFill>
+                <a:effectLst/>
+                <a:highlight>
+                  <a:srgbClr val="1F1F1F"/>
+                </a:highlight>
+                <a:latin typeface="Consolas" panose="020B0609020204030204" pitchFamily="49" charset="0"/>
+              </a:rPr>
+              <a:t>.</a:t>
+            </a:r>
+            <a:endParaRPr lang="ko-KR" altLang="en-US" b="0" dirty="0">
+              <a:solidFill>
+                <a:srgbClr val="CCCCCC"/>
+              </a:solidFill>
+              <a:effectLst/>
+              <a:highlight>
+                <a:srgbClr val="1F1F1F"/>
+              </a:highlight>
+              <a:latin typeface="Consolas" panose="020B0609020204030204" pitchFamily="49" charset="0"/>
+            </a:endParaRPr>
+          </a:p>
+          <a:p>
+            <a:endParaRPr lang="en-US" altLang="ko-KR" b="0" dirty="0">
+              <a:solidFill>
+                <a:srgbClr val="6A9955"/>
+              </a:solidFill>
+              <a:effectLst/>
+              <a:highlight>
+                <a:srgbClr val="1F1F1F"/>
+              </a:highlight>
+              <a:latin typeface="Consolas" panose="020B0609020204030204" pitchFamily="49" charset="0"/>
+            </a:endParaRPr>
+          </a:p>
+          <a:p>
             <a:r>
               <a:rPr lang="en-US" altLang="ko-KR" b="0" dirty="0">
                 <a:solidFill>
@@ -997,7 +1990,7 @@
 </p:notes>
 </file>
 
-<file path=ppt/notesSlides/notesSlide11.xml><?xml version="1.0" encoding="utf-8"?>
+<file path=ppt/notesSlides/notesSlide13.xml><?xml version="1.0" encoding="utf-8"?>
 <p:notes xmlns:a="http://schemas.openxmlformats.org/drawingml/2006/main" xmlns:r="http://schemas.openxmlformats.org/officeDocument/2006/relationships" xmlns:p="http://schemas.openxmlformats.org/presentationml/2006/main">
   <p:cSld>
     <p:spTree>
@@ -1272,48 +2265,6 @@
           <a:lstStyle/>
           <a:p>
             <a:r>
-              <a:rPr lang="en-US" altLang="ko-KR" dirty="0"/>
-              <a:t>slice</a:t>
-            </a:r>
-            <a:r>
-              <a:rPr lang="ko-KR" altLang="en-US" dirty="0"/>
-              <a:t>의 매개변수로 </a:t>
-            </a:r>
-            <a:r>
-              <a:rPr lang="ko-KR" altLang="en-US" dirty="0" err="1"/>
-              <a:t>음수값이</a:t>
-            </a:r>
-            <a:r>
-              <a:rPr lang="ko-KR" altLang="en-US" dirty="0"/>
-              <a:t> 들어간다면 뒤에서부터 뺀다</a:t>
-            </a:r>
-            <a:r>
-              <a:rPr lang="en-US" altLang="ko-KR" dirty="0"/>
-              <a:t>. -1 </a:t>
-            </a:r>
-            <a:r>
-              <a:rPr lang="ko-KR" altLang="en-US" dirty="0"/>
-              <a:t>부터</a:t>
-            </a:r>
-            <a:r>
-              <a:rPr lang="ko-KR" altLang="en-US" baseline="0" dirty="0"/>
-              <a:t> </a:t>
-            </a:r>
-            <a:r>
-              <a:rPr lang="ko-KR" altLang="en-US" baseline="0" dirty="0" err="1"/>
-              <a:t>맨뒤의</a:t>
-            </a:r>
-            <a:r>
-              <a:rPr lang="ko-KR" altLang="en-US" baseline="0" dirty="0"/>
-              <a:t> 문자를 가리키는 것</a:t>
-            </a:r>
-            <a:endParaRPr lang="en-US" altLang="ko-KR" baseline="0" dirty="0"/>
-          </a:p>
-          <a:p>
-            <a:endParaRPr lang="en-US" altLang="ko-KR" baseline="0" dirty="0"/>
-          </a:p>
-          <a:p>
-            <a:r>
               <a:rPr lang="en-US" altLang="ko-KR" baseline="0" dirty="0" err="1"/>
               <a:t>indexOf</a:t>
             </a:r>
@@ -1520,6 +2471,66 @@
               <a:tabLst/>
               <a:defRPr/>
             </a:pPr>
+            <a:r>
+              <a:rPr lang="ko-KR" altLang="en-US" sz="1200" dirty="0"/>
+              <a:t>속성 </a:t>
+            </a:r>
+            <a:r>
+              <a:rPr lang="en-US" altLang="ko-KR" sz="1200" dirty="0"/>
+              <a:t>: </a:t>
+            </a:r>
+            <a:r>
+              <a:rPr lang="ko-KR" altLang="en-US" sz="1200" dirty="0"/>
+              <a:t>객체의 상태나 데이터를 나타냄 </a:t>
+            </a:r>
+            <a:r>
+              <a:rPr lang="en-US" altLang="ko-KR" sz="1200" dirty="0"/>
+              <a:t>/ </a:t>
+            </a:r>
+            <a:r>
+              <a:rPr lang="ko-KR" altLang="en-US" sz="1200" dirty="0"/>
+              <a:t>객체의 특징이나 특성 정의</a:t>
+            </a:r>
+            <a:endParaRPr lang="en-US" altLang="ko-KR" sz="1200" dirty="0"/>
+          </a:p>
+          <a:p>
+            <a:pPr marL="0" marR="0" indent="0" algn="l" defTabSz="914400" rtl="0" eaLnBrk="1" fontAlgn="auto" latinLnBrk="1" hangingPunct="1">
+              <a:lnSpc>
+                <a:spcPct val="100000"/>
+              </a:lnSpc>
+              <a:spcBef>
+                <a:spcPts val="0"/>
+              </a:spcBef>
+              <a:spcAft>
+                <a:spcPts val="0"/>
+              </a:spcAft>
+              <a:buClrTx/>
+              <a:buSzTx/>
+              <a:buFontTx/>
+              <a:buNone/>
+              <a:tabLst/>
+              <a:defRPr/>
+            </a:pPr>
+            <a:r>
+              <a:rPr lang="ko-KR" altLang="en-US" sz="1200" dirty="0"/>
+              <a:t>메서드 </a:t>
+            </a:r>
+            <a:r>
+              <a:rPr lang="en-US" altLang="ko-KR" sz="1200" dirty="0"/>
+              <a:t>: </a:t>
+            </a:r>
+            <a:r>
+              <a:rPr lang="ko-KR" altLang="en-US" sz="1200" dirty="0"/>
+              <a:t>객체가 수행하는 동작을 정의</a:t>
+            </a:r>
+            <a:r>
+              <a:rPr lang="en-US" altLang="ko-KR" sz="1200" dirty="0"/>
+              <a:t> / </a:t>
+            </a:r>
+            <a:r>
+              <a:rPr lang="ko-KR" altLang="en-US" sz="1200" dirty="0"/>
+              <a:t>객체의 속성을 변경하거나 특정 작업 수행</a:t>
+            </a:r>
             <a:endParaRPr lang="en-US" altLang="ko-KR" sz="1200" dirty="0"/>
           </a:p>
           <a:p>
@@ -2218,18 +3229,247 @@
           <a:lstStyle/>
           <a:p>
             <a:r>
-              <a:rPr lang="ko-KR" altLang="en-US" dirty="0"/>
-              <a:t>한번 보시고 나중에 해봐라</a:t>
-            </a:r>
-            <a:r>
-              <a:rPr lang="en-US" altLang="ko-KR" dirty="0"/>
-              <a:t>. </a:t>
-            </a:r>
-            <a:r>
-              <a:rPr lang="ko-KR" altLang="en-US" dirty="0"/>
-              <a:t>실습용</a:t>
-            </a:r>
-            <a:endParaRPr lang="en-US" altLang="ko-KR" dirty="0"/>
+              <a:rPr lang="en-US" altLang="ko-KR" b="0" dirty="0">
+                <a:solidFill>
+                  <a:srgbClr val="6A9955"/>
+                </a:solidFill>
+                <a:effectLst/>
+                <a:highlight>
+                  <a:srgbClr val="1F1F1F"/>
+                </a:highlight>
+                <a:latin typeface="Consolas" panose="020B0609020204030204" pitchFamily="49" charset="0"/>
+              </a:rPr>
+              <a:t>// </a:t>
+            </a:r>
+            <a:r>
+              <a:rPr lang="ko-KR" altLang="en-US" b="0" dirty="0">
+                <a:solidFill>
+                  <a:srgbClr val="6A9955"/>
+                </a:solidFill>
+                <a:effectLst/>
+                <a:highlight>
+                  <a:srgbClr val="1F1F1F"/>
+                </a:highlight>
+                <a:latin typeface="Consolas" panose="020B0609020204030204" pitchFamily="49" charset="0"/>
+              </a:rPr>
+              <a:t>이 반복문은 배열의 요소를 직접 참조하므로 인덱스를 사용할 필요가 </a:t>
+            </a:r>
+            <a:r>
+              <a:rPr lang="en-US" altLang="ko-KR" b="0" dirty="0">
+                <a:solidFill>
+                  <a:srgbClr val="6A9955"/>
+                </a:solidFill>
+                <a:effectLst/>
+                <a:highlight>
+                  <a:srgbClr val="1F1F1F"/>
+                </a:highlight>
+                <a:latin typeface="Consolas" panose="020B0609020204030204" pitchFamily="49" charset="0"/>
+              </a:rPr>
+              <a:t>x</a:t>
+            </a:r>
+            <a:endParaRPr lang="ko-KR" altLang="en-US" b="0" dirty="0">
+              <a:solidFill>
+                <a:srgbClr val="CCCCCC"/>
+              </a:solidFill>
+              <a:effectLst/>
+              <a:highlight>
+                <a:srgbClr val="1F1F1F"/>
+              </a:highlight>
+              <a:latin typeface="Consolas" panose="020B0609020204030204" pitchFamily="49" charset="0"/>
+            </a:endParaRPr>
+          </a:p>
+          <a:p>
+            <a:r>
+              <a:rPr lang="en-US" altLang="ko-KR" b="0" dirty="0">
+                <a:solidFill>
+                  <a:srgbClr val="6A9955"/>
+                </a:solidFill>
+                <a:effectLst/>
+                <a:highlight>
+                  <a:srgbClr val="1F1F1F"/>
+                </a:highlight>
+                <a:latin typeface="Consolas" panose="020B0609020204030204" pitchFamily="49" charset="0"/>
+              </a:rPr>
+              <a:t>// </a:t>
+            </a:r>
+            <a:r>
+              <a:rPr lang="ko-KR" altLang="en-US" b="0" dirty="0">
+                <a:solidFill>
+                  <a:srgbClr val="6A9955"/>
+                </a:solidFill>
+                <a:effectLst/>
+                <a:highlight>
+                  <a:srgbClr val="1F1F1F"/>
+                </a:highlight>
+                <a:latin typeface="Consolas" panose="020B0609020204030204" pitchFamily="49" charset="0"/>
+              </a:rPr>
+              <a:t>순서가 있는 구조 반복에 적합</a:t>
+            </a:r>
+            <a:r>
+              <a:rPr lang="en-US" altLang="ko-KR" b="0" dirty="0">
+                <a:solidFill>
+                  <a:srgbClr val="6A9955"/>
+                </a:solidFill>
+                <a:effectLst/>
+                <a:highlight>
+                  <a:srgbClr val="1F1F1F"/>
+                </a:highlight>
+                <a:latin typeface="Consolas" panose="020B0609020204030204" pitchFamily="49" charset="0"/>
+              </a:rPr>
+              <a:t>.</a:t>
+            </a:r>
+            <a:endParaRPr lang="ko-KR" altLang="en-US" b="0" dirty="0">
+              <a:solidFill>
+                <a:srgbClr val="CCCCCC"/>
+              </a:solidFill>
+              <a:effectLst/>
+              <a:highlight>
+                <a:srgbClr val="1F1F1F"/>
+              </a:highlight>
+              <a:latin typeface="Consolas" panose="020B0609020204030204" pitchFamily="49" charset="0"/>
+            </a:endParaRPr>
+          </a:p>
+          <a:p>
+            <a:r>
+              <a:rPr lang="en-US" altLang="ko-KR" b="0" dirty="0">
+                <a:solidFill>
+                  <a:srgbClr val="6A9955"/>
+                </a:solidFill>
+                <a:effectLst/>
+                <a:highlight>
+                  <a:srgbClr val="1F1F1F"/>
+                </a:highlight>
+                <a:latin typeface="Consolas" panose="020B0609020204030204" pitchFamily="49" charset="0"/>
+              </a:rPr>
+              <a:t>// </a:t>
+            </a:r>
+            <a:r>
+              <a:rPr lang="ko-KR" altLang="en-US" b="0" dirty="0">
+                <a:solidFill>
+                  <a:srgbClr val="6A9955"/>
+                </a:solidFill>
+                <a:effectLst/>
+                <a:highlight>
+                  <a:srgbClr val="1F1F1F"/>
+                </a:highlight>
+                <a:latin typeface="Consolas" panose="020B0609020204030204" pitchFamily="49" charset="0"/>
+              </a:rPr>
+              <a:t>배열 </a:t>
+            </a:r>
+            <a:r>
+              <a:rPr lang="en-US" altLang="ko-KR" b="0" dirty="0">
+                <a:solidFill>
+                  <a:srgbClr val="6A9955"/>
+                </a:solidFill>
+                <a:effectLst/>
+                <a:highlight>
+                  <a:srgbClr val="1F1F1F"/>
+                </a:highlight>
+                <a:latin typeface="Consolas" panose="020B0609020204030204" pitchFamily="49" charset="0"/>
+              </a:rPr>
+              <a:t>'alphabets'</a:t>
+            </a:r>
+            <a:r>
+              <a:rPr lang="ko-KR" altLang="en-US" b="0" dirty="0">
+                <a:solidFill>
+                  <a:srgbClr val="6A9955"/>
+                </a:solidFill>
+                <a:effectLst/>
+                <a:highlight>
+                  <a:srgbClr val="1F1F1F"/>
+                </a:highlight>
+                <a:latin typeface="Consolas" panose="020B0609020204030204" pitchFamily="49" charset="0"/>
+              </a:rPr>
+              <a:t>의 각 요소를 반복하면서 </a:t>
+            </a:r>
+            <a:r>
+              <a:rPr lang="en-US" altLang="ko-KR" b="0" dirty="0">
+                <a:solidFill>
+                  <a:srgbClr val="6A9955"/>
+                </a:solidFill>
+                <a:effectLst/>
+                <a:highlight>
+                  <a:srgbClr val="1F1F1F"/>
+                </a:highlight>
+                <a:latin typeface="Consolas" panose="020B0609020204030204" pitchFamily="49" charset="0"/>
+              </a:rPr>
+              <a:t>'alpha' </a:t>
+            </a:r>
+            <a:r>
+              <a:rPr lang="ko-KR" altLang="en-US" b="0" dirty="0">
+                <a:solidFill>
+                  <a:srgbClr val="6A9955"/>
+                </a:solidFill>
+                <a:effectLst/>
+                <a:highlight>
+                  <a:srgbClr val="1F1F1F"/>
+                </a:highlight>
+                <a:latin typeface="Consolas" panose="020B0609020204030204" pitchFamily="49" charset="0"/>
+              </a:rPr>
+              <a:t>변수에 순서대로 할당하고</a:t>
+            </a:r>
+            <a:r>
+              <a:rPr lang="en-US" altLang="ko-KR" b="0" dirty="0">
+                <a:solidFill>
+                  <a:srgbClr val="6A9955"/>
+                </a:solidFill>
+                <a:effectLst/>
+                <a:highlight>
+                  <a:srgbClr val="1F1F1F"/>
+                </a:highlight>
+                <a:latin typeface="Consolas" panose="020B0609020204030204" pitchFamily="49" charset="0"/>
+              </a:rPr>
+              <a:t>, </a:t>
+            </a:r>
+            <a:r>
+              <a:rPr lang="ko-KR" altLang="en-US" b="0" dirty="0">
+                <a:solidFill>
+                  <a:srgbClr val="6A9955"/>
+                </a:solidFill>
+                <a:effectLst/>
+                <a:highlight>
+                  <a:srgbClr val="1F1F1F"/>
+                </a:highlight>
+                <a:latin typeface="Consolas" panose="020B0609020204030204" pitchFamily="49" charset="0"/>
+              </a:rPr>
+              <a:t>각각 요소에 대해 </a:t>
+            </a:r>
+            <a:r>
+              <a:rPr lang="ko-KR" altLang="en-US" b="0" dirty="0" err="1">
+                <a:solidFill>
+                  <a:srgbClr val="6A9955"/>
+                </a:solidFill>
+                <a:effectLst/>
+                <a:highlight>
+                  <a:srgbClr val="1F1F1F"/>
+                </a:highlight>
+                <a:latin typeface="Consolas" panose="020B0609020204030204" pitchFamily="49" charset="0"/>
+              </a:rPr>
+              <a:t>반복문</a:t>
+            </a:r>
+            <a:r>
+              <a:rPr lang="ko-KR" altLang="en-US" b="0" dirty="0">
+                <a:solidFill>
+                  <a:srgbClr val="6A9955"/>
+                </a:solidFill>
+                <a:effectLst/>
+                <a:highlight>
+                  <a:srgbClr val="1F1F1F"/>
+                </a:highlight>
+                <a:latin typeface="Consolas" panose="020B0609020204030204" pitchFamily="49" charset="0"/>
+              </a:rPr>
+              <a:t> 블록 실행</a:t>
+            </a:r>
+            <a:endParaRPr lang="ko-KR" altLang="en-US" b="0" dirty="0">
+              <a:solidFill>
+                <a:srgbClr val="CCCCCC"/>
+              </a:solidFill>
+              <a:effectLst/>
+              <a:highlight>
+                <a:srgbClr val="1F1F1F"/>
+              </a:highlight>
+              <a:latin typeface="Consolas" panose="020B0609020204030204" pitchFamily="49" charset="0"/>
+            </a:endParaRPr>
           </a:p>
           <a:p>
             <a:endParaRPr lang="ko-KR" altLang="en-US" dirty="0"/>
@@ -2253,7 +3493,7 @@
           <a:p>
             <a:fld id="{C09E5BFC-1559-42F1-8940-AB342D56BF02}" type="slidenum">
               <a:rPr lang="ko-KR" altLang="en-US" smtClean="0"/>
-              <a:t>15</a:t>
+              <a:t>13</a:t>
             </a:fld>
             <a:endParaRPr lang="ko-KR" altLang="en-US"/>
           </a:p>
@@ -2262,7 +3502,7 @@
     </p:spTree>
     <p:extLst>
       <p:ext uri="{BB962C8B-B14F-4D97-AF65-F5344CB8AC3E}">
-        <p14:creationId xmlns:p14="http://schemas.microsoft.com/office/powerpoint/2010/main" val="1074702357"/>
+        <p14:creationId xmlns:p14="http://schemas.microsoft.com/office/powerpoint/2010/main" val="2468713467"/>
       </p:ext>
     </p:extLst>
   </p:cSld>
@@ -6051,7 +7291,7 @@
         </p:nvSpPr>
         <p:spPr>
           <a:xfrm>
-            <a:off x="697523" y="1565213"/>
+            <a:off x="697523" y="1387188"/>
             <a:ext cx="11189677" cy="4885192"/>
           </a:xfrm>
         </p:spPr>
@@ -6750,7 +7990,7 @@
             </a:r>
             <a:r>
               <a:rPr lang="en-US" altLang="ko-KR" dirty="0"/>
-              <a:t>, </a:t>
+              <a:t>) </a:t>
             </a:r>
             <a:r>
               <a:rPr lang="ko-KR" altLang="en-US" dirty="0">
@@ -7905,31 +9145,6 @@
       </p:grpSpPr>
       <p:sp>
         <p:nvSpPr>
-          <p:cNvPr id="2" name="내용 개체 틀 1">
-            <a:extLst>
-              <a:ext uri="{FF2B5EF4-FFF2-40B4-BE49-F238E27FC236}">
-                <a16:creationId xmlns:a16="http://schemas.microsoft.com/office/drawing/2014/main" id="{A3099348-D45F-2737-7184-9984E42368B5}"/>
-              </a:ext>
-            </a:extLst>
-          </p:cNvPr>
-          <p:cNvSpPr>
-            <a:spLocks noGrp="1"/>
-          </p:cNvSpPr>
-          <p:nvPr>
-            <p:ph idx="1"/>
-          </p:nvPr>
-        </p:nvSpPr>
-        <p:spPr/>
-        <p:txBody>
-          <a:bodyPr/>
-          <a:lstStyle/>
-          <a:p>
-            <a:endParaRPr lang="ko-KR" altLang="en-US"/>
-          </a:p>
-        </p:txBody>
-      </p:sp>
-      <p:sp>
-        <p:nvSpPr>
           <p:cNvPr id="3" name="날짜 개체 틀 2">
             <a:extLst>
               <a:ext uri="{FF2B5EF4-FFF2-40B4-BE49-F238E27FC236}">
@@ -8013,7 +9228,7 @@
             </a:r>
             <a:r>
               <a:rPr lang="en-US" altLang="ko-KR" dirty="0"/>
-              <a:t>, </a:t>
+              <a:t>) </a:t>
             </a:r>
             <a:r>
               <a:rPr lang="en-US" altLang="ko-KR" dirty="0">
@@ -8053,8 +9268,8 @@
         </p:nvSpPr>
         <p:spPr>
           <a:xfrm>
-            <a:off x="731939" y="1600582"/>
-            <a:ext cx="8621786" cy="3693319"/>
+            <a:off x="1015160" y="2021180"/>
+            <a:ext cx="8621786" cy="3139321"/>
           </a:xfrm>
           <a:prstGeom prst="rect">
             <a:avLst/>
@@ -8526,186 +9741,6 @@
                 <a:ea typeface="Kim jung chul Gothic Regular" panose="020B0503000000000000" pitchFamily="50" charset="-127"/>
               </a:rPr>
             </a:br>
-            <a:r>
-              <a:rPr lang="en-US" altLang="ko-KR" b="0" dirty="0">
-                <a:solidFill>
-                  <a:srgbClr val="569CD6"/>
-                </a:solidFill>
-                <a:effectLst/>
-                <a:latin typeface="Consolas" panose="020B0609020204030204" pitchFamily="49" charset="0"/>
-                <a:ea typeface="Kim jung chul Gothic Regular" panose="020B0503000000000000" pitchFamily="50" charset="-127"/>
-              </a:rPr>
-              <a:t>let</a:t>
-            </a:r>
-            <a:r>
-              <a:rPr lang="en-US" altLang="ko-KR" b="0" dirty="0">
-                <a:solidFill>
-                  <a:srgbClr val="D4D4D4"/>
-                </a:solidFill>
-                <a:effectLst/>
-                <a:latin typeface="Consolas" panose="020B0609020204030204" pitchFamily="49" charset="0"/>
-                <a:ea typeface="Kim jung chul Gothic Regular" panose="020B0503000000000000" pitchFamily="50" charset="-127"/>
-              </a:rPr>
-              <a:t> </a:t>
-            </a:r>
-            <a:r>
-              <a:rPr lang="en-US" altLang="ko-KR" b="0" dirty="0" err="1">
-                <a:solidFill>
-                  <a:srgbClr val="9CDCFE"/>
-                </a:solidFill>
-                <a:effectLst/>
-                <a:latin typeface="Consolas" panose="020B0609020204030204" pitchFamily="49" charset="0"/>
-                <a:ea typeface="Kim jung chul Gothic Regular" panose="020B0503000000000000" pitchFamily="50" charset="-127"/>
-              </a:rPr>
-              <a:t>numbersLength</a:t>
-            </a:r>
-            <a:r>
-              <a:rPr lang="en-US" altLang="ko-KR" b="0" dirty="0">
-                <a:solidFill>
-                  <a:srgbClr val="D4D4D4"/>
-                </a:solidFill>
-                <a:effectLst/>
-                <a:latin typeface="Consolas" panose="020B0609020204030204" pitchFamily="49" charset="0"/>
-                <a:ea typeface="Kim jung chul Gothic Regular" panose="020B0503000000000000" pitchFamily="50" charset="-127"/>
-              </a:rPr>
-              <a:t> = </a:t>
-            </a:r>
-            <a:r>
-              <a:rPr lang="en-US" altLang="ko-KR" b="0" dirty="0" err="1">
-                <a:solidFill>
-                  <a:srgbClr val="9CDCFE"/>
-                </a:solidFill>
-                <a:effectLst/>
-                <a:latin typeface="Consolas" panose="020B0609020204030204" pitchFamily="49" charset="0"/>
-                <a:ea typeface="Kim jung chul Gothic Regular" panose="020B0503000000000000" pitchFamily="50" charset="-127"/>
-              </a:rPr>
-              <a:t>numbers</a:t>
-            </a:r>
-            <a:r>
-              <a:rPr lang="en-US" altLang="ko-KR" b="0" dirty="0" err="1">
-                <a:solidFill>
-                  <a:srgbClr val="D4D4D4"/>
-                </a:solidFill>
-                <a:effectLst/>
-                <a:latin typeface="Consolas" panose="020B0609020204030204" pitchFamily="49" charset="0"/>
-                <a:ea typeface="Kim jung chul Gothic Regular" panose="020B0503000000000000" pitchFamily="50" charset="-127"/>
-              </a:rPr>
-              <a:t>.</a:t>
-            </a:r>
-            <a:r>
-              <a:rPr lang="en-US" altLang="ko-KR" b="0" dirty="0" err="1">
-                <a:solidFill>
-                  <a:srgbClr val="9CDCFE"/>
-                </a:solidFill>
-                <a:effectLst/>
-                <a:latin typeface="Consolas" panose="020B0609020204030204" pitchFamily="49" charset="0"/>
-                <a:ea typeface="Kim jung chul Gothic Regular" panose="020B0503000000000000" pitchFamily="50" charset="-127"/>
-              </a:rPr>
-              <a:t>length</a:t>
-            </a:r>
-            <a:r>
-              <a:rPr lang="en-US" altLang="ko-KR" b="0" dirty="0">
-                <a:solidFill>
-                  <a:srgbClr val="D4D4D4"/>
-                </a:solidFill>
-                <a:effectLst/>
-                <a:latin typeface="Consolas" panose="020B0609020204030204" pitchFamily="49" charset="0"/>
-                <a:ea typeface="Kim jung chul Gothic Regular" panose="020B0503000000000000" pitchFamily="50" charset="-127"/>
-              </a:rPr>
-              <a:t>;</a:t>
-            </a:r>
-          </a:p>
-          <a:p>
-            <a:r>
-              <a:rPr lang="en-US" altLang="ko-KR" b="0" dirty="0">
-                <a:solidFill>
-                  <a:srgbClr val="569CD6"/>
-                </a:solidFill>
-                <a:effectLst/>
-                <a:latin typeface="Consolas" panose="020B0609020204030204" pitchFamily="49" charset="0"/>
-                <a:ea typeface="Kim jung chul Gothic Regular" panose="020B0503000000000000" pitchFamily="50" charset="-127"/>
-              </a:rPr>
-              <a:t>let</a:t>
-            </a:r>
-            <a:r>
-              <a:rPr lang="en-US" altLang="ko-KR" b="0" dirty="0">
-                <a:solidFill>
-                  <a:srgbClr val="D4D4D4"/>
-                </a:solidFill>
-                <a:effectLst/>
-                <a:latin typeface="Consolas" panose="020B0609020204030204" pitchFamily="49" charset="0"/>
-                <a:ea typeface="Kim jung chul Gothic Regular" panose="020B0503000000000000" pitchFamily="50" charset="-127"/>
-              </a:rPr>
-              <a:t> </a:t>
-            </a:r>
-            <a:r>
-              <a:rPr lang="en-US" altLang="ko-KR" b="0" dirty="0" err="1">
-                <a:solidFill>
-                  <a:srgbClr val="9CDCFE"/>
-                </a:solidFill>
-                <a:effectLst/>
-                <a:latin typeface="Consolas" panose="020B0609020204030204" pitchFamily="49" charset="0"/>
-                <a:ea typeface="Kim jung chul Gothic Regular" panose="020B0503000000000000" pitchFamily="50" charset="-127"/>
-              </a:rPr>
-              <a:t>fruitsLength</a:t>
-            </a:r>
-            <a:r>
-              <a:rPr lang="en-US" altLang="ko-KR" b="0" dirty="0">
-                <a:solidFill>
-                  <a:srgbClr val="D4D4D4"/>
-                </a:solidFill>
-                <a:effectLst/>
-                <a:latin typeface="Consolas" panose="020B0609020204030204" pitchFamily="49" charset="0"/>
-                <a:ea typeface="Kim jung chul Gothic Regular" panose="020B0503000000000000" pitchFamily="50" charset="-127"/>
-              </a:rPr>
-              <a:t> = </a:t>
-            </a:r>
-            <a:r>
-              <a:rPr lang="en-US" altLang="ko-KR" b="0" dirty="0" err="1">
-                <a:solidFill>
-                  <a:srgbClr val="9CDCFE"/>
-                </a:solidFill>
-                <a:effectLst/>
-                <a:latin typeface="Consolas" panose="020B0609020204030204" pitchFamily="49" charset="0"/>
-                <a:ea typeface="Kim jung chul Gothic Regular" panose="020B0503000000000000" pitchFamily="50" charset="-127"/>
-              </a:rPr>
-              <a:t>fruits</a:t>
-            </a:r>
-            <a:r>
-              <a:rPr lang="en-US" altLang="ko-KR" b="0" dirty="0" err="1">
-                <a:solidFill>
-                  <a:srgbClr val="D4D4D4"/>
-                </a:solidFill>
-                <a:effectLst/>
-                <a:latin typeface="Consolas" panose="020B0609020204030204" pitchFamily="49" charset="0"/>
-                <a:ea typeface="Kim jung chul Gothic Regular" panose="020B0503000000000000" pitchFamily="50" charset="-127"/>
-              </a:rPr>
-              <a:t>.</a:t>
-            </a:r>
-            <a:r>
-              <a:rPr lang="en-US" altLang="ko-KR" b="0" dirty="0" err="1">
-                <a:solidFill>
-                  <a:srgbClr val="9CDCFE"/>
-                </a:solidFill>
-                <a:effectLst/>
-                <a:latin typeface="Consolas" panose="020B0609020204030204" pitchFamily="49" charset="0"/>
-                <a:ea typeface="Kim jung chul Gothic Regular" panose="020B0503000000000000" pitchFamily="50" charset="-127"/>
-              </a:rPr>
-              <a:t>length</a:t>
-            </a:r>
-            <a:r>
-              <a:rPr lang="en-US" altLang="ko-KR" b="0" dirty="0">
-                <a:solidFill>
-                  <a:srgbClr val="D4D4D4"/>
-                </a:solidFill>
-                <a:effectLst/>
-                <a:latin typeface="Consolas" panose="020B0609020204030204" pitchFamily="49" charset="0"/>
-                <a:ea typeface="Kim jung chul Gothic Regular" panose="020B0503000000000000" pitchFamily="50" charset="-127"/>
-              </a:rPr>
-              <a:t>;</a:t>
-            </a:r>
-          </a:p>
-          <a:p>
             <a:br>
               <a:rPr lang="en-US" altLang="ko-KR" b="0" dirty="0">
                 <a:solidFill>
@@ -9250,7 +10285,7 @@
             </a:r>
             <a:r>
               <a:rPr lang="en-US" altLang="ko-KR" dirty="0"/>
-              <a:t>, </a:t>
+              <a:t>) </a:t>
             </a:r>
             <a:r>
               <a:rPr lang="en-US" altLang="ko-KR" dirty="0">
@@ -9290,8 +10325,8 @@
         </p:nvSpPr>
         <p:spPr>
           <a:xfrm>
-            <a:off x="1815626" y="1285976"/>
-            <a:ext cx="8560748" cy="5042361"/>
+            <a:off x="1653786" y="2313664"/>
+            <a:ext cx="8560748" cy="2862322"/>
           </a:xfrm>
           <a:prstGeom prst="rect">
             <a:avLst/>
@@ -10052,7 +11087,7 @@
                 <a:latin typeface="Consolas" panose="020B0609020204030204" pitchFamily="49" charset="0"/>
                 <a:ea typeface="Kim jung chul Gothic Regular" panose="020B0503000000000000" pitchFamily="50" charset="-127"/>
               </a:rPr>
-              <a:t>numbers</a:t>
+              <a:t>fruits</a:t>
             </a:r>
             <a:r>
               <a:rPr lang="en-US" altLang="ko-KR" b="0" dirty="0" err="1">
@@ -10085,7 +11120,29 @@
                 <a:latin typeface="Consolas" panose="020B0609020204030204" pitchFamily="49" charset="0"/>
                 <a:ea typeface="Kim jung chul Gothic Regular" panose="020B0503000000000000" pitchFamily="50" charset="-127"/>
               </a:rPr>
-              <a:t>((</a:t>
+              <a:t>(</a:t>
+            </a:r>
+            <a:r>
+              <a:rPr lang="en-US" altLang="ko-KR" b="0" dirty="0">
+                <a:solidFill>
+                  <a:srgbClr val="569CD6"/>
+                </a:solidFill>
+                <a:effectLst/>
+                <a:latin typeface="Consolas" panose="020B0609020204030204" pitchFamily="49" charset="0"/>
+                <a:ea typeface="Kim jung chul Gothic Regular" panose="020B0503000000000000" pitchFamily="50" charset="-127"/>
+              </a:rPr>
+              <a:t>function</a:t>
+            </a:r>
+            <a:r>
+              <a:rPr lang="en-US" altLang="ko-KR" b="0" dirty="0">
+                <a:solidFill>
+                  <a:srgbClr val="D4D4D4"/>
+                </a:solidFill>
+                <a:effectLst/>
+                <a:latin typeface="Consolas" panose="020B0609020204030204" pitchFamily="49" charset="0"/>
+                <a:ea typeface="Kim jung chul Gothic Regular" panose="020B0503000000000000" pitchFamily="50" charset="-127"/>
+              </a:rPr>
+              <a:t> (</a:t>
             </a:r>
             <a:r>
               <a:rPr lang="en-US" altLang="ko-KR" b="0" dirty="0">
@@ -10096,7 +11153,7 @@
                 <a:latin typeface="Consolas" panose="020B0609020204030204" pitchFamily="49" charset="0"/>
                 <a:ea typeface="Kim jung chul Gothic Regular" panose="020B0503000000000000" pitchFamily="50" charset="-127"/>
               </a:rPr>
-              <a:t>number</a:t>
+              <a:t>fruit</a:t>
             </a:r>
             <a:r>
               <a:rPr lang="en-US" altLang="ko-KR" b="0" dirty="0">
@@ -10110,7 +11167,7 @@
               <a:t>, </a:t>
             </a:r>
             <a:r>
-              <a:rPr lang="en-US" altLang="ko-KR" b="0" dirty="0">
+              <a:rPr lang="en-US" altLang="ko-KR" b="0" dirty="0" err="1">
                 <a:solidFill>
                   <a:srgbClr val="9CDCFE"/>
                 </a:solidFill>
@@ -10118,7 +11175,7 @@
                 <a:latin typeface="Consolas" panose="020B0609020204030204" pitchFamily="49" charset="0"/>
                 <a:ea typeface="Kim jung chul Gothic Regular" panose="020B0503000000000000" pitchFamily="50" charset="-127"/>
               </a:rPr>
-              <a:t>index</a:t>
+              <a:t>i</a:t>
             </a:r>
             <a:r>
               <a:rPr lang="en-US" altLang="ko-KR" b="0" dirty="0">
@@ -10132,7 +11189,7 @@
               <a:t>, </a:t>
             </a:r>
             <a:r>
-              <a:rPr lang="en-US" altLang="ko-KR" b="0" dirty="0">
+              <a:rPr lang="en-US" altLang="ko-KR" b="0" dirty="0" err="1">
                 <a:solidFill>
                   <a:srgbClr val="9CDCFE"/>
                 </a:solidFill>
@@ -10140,308 +11197,6 @@
                 <a:latin typeface="Consolas" panose="020B0609020204030204" pitchFamily="49" charset="0"/>
                 <a:ea typeface="Kim jung chul Gothic Regular" panose="020B0503000000000000" pitchFamily="50" charset="-127"/>
               </a:rPr>
-              <a:t>array</a:t>
-            </a:r>
-            <a:r>
-              <a:rPr lang="en-US" altLang="ko-KR" b="0" dirty="0">
-                <a:solidFill>
-                  <a:srgbClr val="D4D4D4"/>
-                </a:solidFill>
-                <a:effectLst/>
-                <a:latin typeface="Consolas" panose="020B0609020204030204" pitchFamily="49" charset="0"/>
-                <a:ea typeface="Kim jung chul Gothic Regular" panose="020B0503000000000000" pitchFamily="50" charset="-127"/>
-              </a:rPr>
-              <a:t>) </a:t>
-            </a:r>
-            <a:r>
-              <a:rPr lang="en-US" altLang="ko-KR" b="0" dirty="0">
-                <a:solidFill>
-                  <a:srgbClr val="569CD6"/>
-                </a:solidFill>
-                <a:effectLst/>
-                <a:latin typeface="Consolas" panose="020B0609020204030204" pitchFamily="49" charset="0"/>
-                <a:ea typeface="Kim jung chul Gothic Regular" panose="020B0503000000000000" pitchFamily="50" charset="-127"/>
-              </a:rPr>
-              <a:t>=&gt;</a:t>
-            </a:r>
-            <a:r>
-              <a:rPr lang="en-US" altLang="ko-KR" b="0" dirty="0">
-                <a:solidFill>
-                  <a:srgbClr val="D4D4D4"/>
-                </a:solidFill>
-                <a:effectLst/>
-                <a:latin typeface="Consolas" panose="020B0609020204030204" pitchFamily="49" charset="0"/>
-                <a:ea typeface="Kim jung chul Gothic Regular" panose="020B0503000000000000" pitchFamily="50" charset="-127"/>
-              </a:rPr>
-              <a:t> {</a:t>
-            </a:r>
-          </a:p>
-          <a:p>
-            <a:r>
-              <a:rPr lang="en-US" altLang="ko-KR" b="0" dirty="0">
-                <a:solidFill>
-                  <a:srgbClr val="D4D4D4"/>
-                </a:solidFill>
-                <a:effectLst/>
-                <a:latin typeface="Consolas" panose="020B0609020204030204" pitchFamily="49" charset="0"/>
-                <a:ea typeface="Kim jung chul Gothic Regular" panose="020B0503000000000000" pitchFamily="50" charset="-127"/>
-              </a:rPr>
-              <a:t>  </a:t>
-            </a:r>
-            <a:r>
-              <a:rPr lang="en-US" altLang="ko-KR" b="0" dirty="0">
-                <a:solidFill>
-                  <a:srgbClr val="9CDCFE"/>
-                </a:solidFill>
-                <a:effectLst/>
-                <a:latin typeface="Consolas" panose="020B0609020204030204" pitchFamily="49" charset="0"/>
-                <a:ea typeface="Kim jung chul Gothic Regular" panose="020B0503000000000000" pitchFamily="50" charset="-127"/>
-              </a:rPr>
-              <a:t>console</a:t>
-            </a:r>
-            <a:r>
-              <a:rPr lang="en-US" altLang="ko-KR" b="0" dirty="0">
-                <a:solidFill>
-                  <a:srgbClr val="D4D4D4"/>
-                </a:solidFill>
-                <a:effectLst/>
-                <a:latin typeface="Consolas" panose="020B0609020204030204" pitchFamily="49" charset="0"/>
-                <a:ea typeface="Kim jung chul Gothic Regular" panose="020B0503000000000000" pitchFamily="50" charset="-127"/>
-              </a:rPr>
-              <a:t>.</a:t>
-            </a:r>
-            <a:r>
-              <a:rPr lang="en-US" altLang="ko-KR" b="0" dirty="0">
-                <a:solidFill>
-                  <a:srgbClr val="DCDCAA"/>
-                </a:solidFill>
-                <a:effectLst/>
-                <a:latin typeface="Consolas" panose="020B0609020204030204" pitchFamily="49" charset="0"/>
-                <a:ea typeface="Kim jung chul Gothic Regular" panose="020B0503000000000000" pitchFamily="50" charset="-127"/>
-              </a:rPr>
-              <a:t>log</a:t>
-            </a:r>
-            <a:r>
-              <a:rPr lang="en-US" altLang="ko-KR" b="0" dirty="0">
-                <a:solidFill>
-                  <a:srgbClr val="D4D4D4"/>
-                </a:solidFill>
-                <a:effectLst/>
-                <a:latin typeface="Consolas" panose="020B0609020204030204" pitchFamily="49" charset="0"/>
-                <a:ea typeface="Kim jung chul Gothic Regular" panose="020B0503000000000000" pitchFamily="50" charset="-127"/>
-              </a:rPr>
-              <a:t>(</a:t>
-            </a:r>
-            <a:r>
-              <a:rPr lang="en-US" altLang="ko-KR" b="0" dirty="0">
-                <a:solidFill>
-                  <a:srgbClr val="9CDCFE"/>
-                </a:solidFill>
-                <a:effectLst/>
-                <a:latin typeface="Consolas" panose="020B0609020204030204" pitchFamily="49" charset="0"/>
-                <a:ea typeface="Kim jung chul Gothic Regular" panose="020B0503000000000000" pitchFamily="50" charset="-127"/>
-              </a:rPr>
-              <a:t>number</a:t>
-            </a:r>
-            <a:r>
-              <a:rPr lang="en-US" altLang="ko-KR" b="0" dirty="0">
-                <a:solidFill>
-                  <a:srgbClr val="D4D4D4"/>
-                </a:solidFill>
-                <a:effectLst/>
-                <a:latin typeface="Consolas" panose="020B0609020204030204" pitchFamily="49" charset="0"/>
-                <a:ea typeface="Kim jung chul Gothic Regular" panose="020B0503000000000000" pitchFamily="50" charset="-127"/>
-              </a:rPr>
-              <a:t>, </a:t>
-            </a:r>
-            <a:r>
-              <a:rPr lang="en-US" altLang="ko-KR" b="0" dirty="0">
-                <a:solidFill>
-                  <a:srgbClr val="9CDCFE"/>
-                </a:solidFill>
-                <a:effectLst/>
-                <a:latin typeface="Consolas" panose="020B0609020204030204" pitchFamily="49" charset="0"/>
-                <a:ea typeface="Kim jung chul Gothic Regular" panose="020B0503000000000000" pitchFamily="50" charset="-127"/>
-              </a:rPr>
-              <a:t>index</a:t>
-            </a:r>
-            <a:r>
-              <a:rPr lang="en-US" altLang="ko-KR" b="0" dirty="0">
-                <a:solidFill>
-                  <a:srgbClr val="D4D4D4"/>
-                </a:solidFill>
-                <a:effectLst/>
-                <a:latin typeface="Consolas" panose="020B0609020204030204" pitchFamily="49" charset="0"/>
-                <a:ea typeface="Kim jung chul Gothic Regular" panose="020B0503000000000000" pitchFamily="50" charset="-127"/>
-              </a:rPr>
-              <a:t>, </a:t>
-            </a:r>
-            <a:r>
-              <a:rPr lang="en-US" altLang="ko-KR" b="0" dirty="0">
-                <a:solidFill>
-                  <a:srgbClr val="9CDCFE"/>
-                </a:solidFill>
-                <a:effectLst/>
-                <a:latin typeface="Consolas" panose="020B0609020204030204" pitchFamily="49" charset="0"/>
-                <a:ea typeface="Kim jung chul Gothic Regular" panose="020B0503000000000000" pitchFamily="50" charset="-127"/>
-              </a:rPr>
-              <a:t>array</a:t>
-            </a:r>
-            <a:r>
-              <a:rPr lang="en-US" altLang="ko-KR" b="0" dirty="0">
-                <a:solidFill>
-                  <a:srgbClr val="D4D4D4"/>
-                </a:solidFill>
-                <a:effectLst/>
-                <a:latin typeface="Consolas" panose="020B0609020204030204" pitchFamily="49" charset="0"/>
-                <a:ea typeface="Kim jung chul Gothic Regular" panose="020B0503000000000000" pitchFamily="50" charset="-127"/>
-              </a:rPr>
-              <a:t>);</a:t>
-            </a:r>
-          </a:p>
-          <a:p>
-            <a:r>
-              <a:rPr lang="en-US" altLang="ko-KR" b="0" dirty="0">
-                <a:solidFill>
-                  <a:srgbClr val="D4D4D4"/>
-                </a:solidFill>
-                <a:effectLst/>
-                <a:latin typeface="Consolas" panose="020B0609020204030204" pitchFamily="49" charset="0"/>
-                <a:ea typeface="Kim jung chul Gothic Regular" panose="020B0503000000000000" pitchFamily="50" charset="-127"/>
-              </a:rPr>
-              <a:t>});</a:t>
-            </a:r>
-          </a:p>
-          <a:p>
-            <a:br>
-              <a:rPr lang="en-US" altLang="ko-KR" b="0" dirty="0">
-                <a:solidFill>
-                  <a:srgbClr val="D4D4D4"/>
-                </a:solidFill>
-                <a:effectLst/>
-                <a:latin typeface="Consolas" panose="020B0609020204030204" pitchFamily="49" charset="0"/>
-                <a:ea typeface="Kim jung chul Gothic Regular" panose="020B0503000000000000" pitchFamily="50" charset="-127"/>
-              </a:rPr>
-            </a:br>
-            <a:r>
-              <a:rPr lang="en-US" altLang="ko-KR" b="0" dirty="0" err="1">
-                <a:solidFill>
-                  <a:srgbClr val="9CDCFE"/>
-                </a:solidFill>
-                <a:effectLst/>
-                <a:latin typeface="Consolas" panose="020B0609020204030204" pitchFamily="49" charset="0"/>
-                <a:ea typeface="Kim jung chul Gothic Regular" panose="020B0503000000000000" pitchFamily="50" charset="-127"/>
-              </a:rPr>
-              <a:t>fruits</a:t>
-            </a:r>
-            <a:r>
-              <a:rPr lang="en-US" altLang="ko-KR" b="0" dirty="0" err="1">
-                <a:solidFill>
-                  <a:srgbClr val="D4D4D4"/>
-                </a:solidFill>
-                <a:effectLst/>
-                <a:latin typeface="Consolas" panose="020B0609020204030204" pitchFamily="49" charset="0"/>
-                <a:ea typeface="Kim jung chul Gothic Regular" panose="020B0503000000000000" pitchFamily="50" charset="-127"/>
-              </a:rPr>
-              <a:t>.</a:t>
-            </a:r>
-            <a:r>
-              <a:rPr lang="en-US" altLang="ko-KR" b="0" dirty="0" err="1">
-                <a:solidFill>
-                  <a:srgbClr val="DCDCAA"/>
-                </a:solidFill>
-                <a:effectLst/>
-                <a:latin typeface="Consolas" panose="020B0609020204030204" pitchFamily="49" charset="0"/>
-                <a:ea typeface="Kim jung chul Gothic Regular" panose="020B0503000000000000" pitchFamily="50" charset="-127"/>
-              </a:rPr>
-              <a:t>forEach</a:t>
-            </a:r>
-            <a:r>
-              <a:rPr lang="en-US" altLang="ko-KR" b="0" dirty="0">
-                <a:solidFill>
-                  <a:srgbClr val="D4D4D4"/>
-                </a:solidFill>
-                <a:effectLst/>
-                <a:latin typeface="Consolas" panose="020B0609020204030204" pitchFamily="49" charset="0"/>
-                <a:ea typeface="Kim jung chul Gothic Regular" panose="020B0503000000000000" pitchFamily="50" charset="-127"/>
-              </a:rPr>
-              <a:t>(</a:t>
-            </a:r>
-            <a:r>
-              <a:rPr lang="en-US" altLang="ko-KR" b="0" dirty="0">
-                <a:solidFill>
-                  <a:srgbClr val="569CD6"/>
-                </a:solidFill>
-                <a:effectLst/>
-                <a:latin typeface="Consolas" panose="020B0609020204030204" pitchFamily="49" charset="0"/>
-                <a:ea typeface="Kim jung chul Gothic Regular" panose="020B0503000000000000" pitchFamily="50" charset="-127"/>
-              </a:rPr>
-              <a:t>function</a:t>
-            </a:r>
-            <a:r>
-              <a:rPr lang="en-US" altLang="ko-KR" b="0" dirty="0">
-                <a:solidFill>
-                  <a:srgbClr val="D4D4D4"/>
-                </a:solidFill>
-                <a:effectLst/>
-                <a:latin typeface="Consolas" panose="020B0609020204030204" pitchFamily="49" charset="0"/>
-                <a:ea typeface="Kim jung chul Gothic Regular" panose="020B0503000000000000" pitchFamily="50" charset="-127"/>
-              </a:rPr>
-              <a:t> (</a:t>
-            </a:r>
-            <a:r>
-              <a:rPr lang="en-US" altLang="ko-KR" b="0" dirty="0">
-                <a:solidFill>
-                  <a:srgbClr val="9CDCFE"/>
-                </a:solidFill>
-                <a:effectLst/>
-                <a:latin typeface="Consolas" panose="020B0609020204030204" pitchFamily="49" charset="0"/>
-                <a:ea typeface="Kim jung chul Gothic Regular" panose="020B0503000000000000" pitchFamily="50" charset="-127"/>
-              </a:rPr>
-              <a:t>fruit</a:t>
-            </a:r>
-            <a:r>
-              <a:rPr lang="en-US" altLang="ko-KR" b="0" dirty="0">
-                <a:solidFill>
-                  <a:srgbClr val="D4D4D4"/>
-                </a:solidFill>
-                <a:effectLst/>
-                <a:latin typeface="Consolas" panose="020B0609020204030204" pitchFamily="49" charset="0"/>
-                <a:ea typeface="Kim jung chul Gothic Regular" panose="020B0503000000000000" pitchFamily="50" charset="-127"/>
-              </a:rPr>
-              <a:t>, </a:t>
-            </a:r>
-            <a:r>
-              <a:rPr lang="en-US" altLang="ko-KR" b="0" dirty="0" err="1">
-                <a:solidFill>
-                  <a:srgbClr val="9CDCFE"/>
-                </a:solidFill>
-                <a:effectLst/>
-                <a:latin typeface="Consolas" panose="020B0609020204030204" pitchFamily="49" charset="0"/>
-                <a:ea typeface="Kim jung chul Gothic Regular" panose="020B0503000000000000" pitchFamily="50" charset="-127"/>
-              </a:rPr>
-              <a:t>i</a:t>
-            </a:r>
-            <a:r>
-              <a:rPr lang="en-US" altLang="ko-KR" b="0" dirty="0">
-                <a:solidFill>
-                  <a:srgbClr val="D4D4D4"/>
-                </a:solidFill>
-                <a:effectLst/>
-                <a:latin typeface="Consolas" panose="020B0609020204030204" pitchFamily="49" charset="0"/>
-                <a:ea typeface="Kim jung chul Gothic Regular" panose="020B0503000000000000" pitchFamily="50" charset="-127"/>
-              </a:rPr>
-              <a:t>, </a:t>
-            </a:r>
-            <a:r>
-              <a:rPr lang="en-US" altLang="ko-KR" b="0" dirty="0" err="1">
-                <a:solidFill>
-                  <a:srgbClr val="9CDCFE"/>
-                </a:solidFill>
-                <a:effectLst/>
-                <a:latin typeface="Consolas" panose="020B0609020204030204" pitchFamily="49" charset="0"/>
-                <a:ea typeface="Kim jung chul Gothic Regular" panose="020B0503000000000000" pitchFamily="50" charset="-127"/>
-              </a:rPr>
               <a:t>arr</a:t>
             </a:r>
             <a:r>
@@ -10454,286 +11209,6 @@
                 <a:ea typeface="Kim jung chul Gothic Regular" panose="020B0503000000000000" pitchFamily="50" charset="-127"/>
               </a:rPr>
               <a:t>) {</a:t>
-            </a:r>
-          </a:p>
-          <a:p>
-            <a:r>
-              <a:rPr lang="en-US" altLang="ko-KR" b="0" dirty="0">
-                <a:solidFill>
-                  <a:srgbClr val="D4D4D4"/>
-                </a:solidFill>
-                <a:effectLst/>
-                <a:latin typeface="Consolas" panose="020B0609020204030204" pitchFamily="49" charset="0"/>
-                <a:ea typeface="Kim jung chul Gothic Regular" panose="020B0503000000000000" pitchFamily="50" charset="-127"/>
-              </a:rPr>
-              <a:t>  </a:t>
-            </a:r>
-            <a:r>
-              <a:rPr lang="en-US" altLang="ko-KR" b="0" dirty="0">
-                <a:solidFill>
-                  <a:srgbClr val="9CDCFE"/>
-                </a:solidFill>
-                <a:effectLst/>
-                <a:latin typeface="Consolas" panose="020B0609020204030204" pitchFamily="49" charset="0"/>
-                <a:ea typeface="Kim jung chul Gothic Regular" panose="020B0503000000000000" pitchFamily="50" charset="-127"/>
-              </a:rPr>
-              <a:t>console</a:t>
-            </a:r>
-            <a:r>
-              <a:rPr lang="en-US" altLang="ko-KR" b="0" dirty="0">
-                <a:solidFill>
-                  <a:srgbClr val="D4D4D4"/>
-                </a:solidFill>
-                <a:effectLst/>
-                <a:latin typeface="Consolas" panose="020B0609020204030204" pitchFamily="49" charset="0"/>
-                <a:ea typeface="Kim jung chul Gothic Regular" panose="020B0503000000000000" pitchFamily="50" charset="-127"/>
-              </a:rPr>
-              <a:t>.</a:t>
-            </a:r>
-            <a:r>
-              <a:rPr lang="en-US" altLang="ko-KR" b="0" dirty="0">
-                <a:solidFill>
-                  <a:srgbClr val="DCDCAA"/>
-                </a:solidFill>
-                <a:effectLst/>
-                <a:latin typeface="Consolas" panose="020B0609020204030204" pitchFamily="49" charset="0"/>
-                <a:ea typeface="Kim jung chul Gothic Regular" panose="020B0503000000000000" pitchFamily="50" charset="-127"/>
-              </a:rPr>
-              <a:t>log</a:t>
-            </a:r>
-            <a:r>
-              <a:rPr lang="en-US" altLang="ko-KR" b="0" dirty="0">
-                <a:solidFill>
-                  <a:srgbClr val="D4D4D4"/>
-                </a:solidFill>
-                <a:effectLst/>
-                <a:latin typeface="Consolas" panose="020B0609020204030204" pitchFamily="49" charset="0"/>
-                <a:ea typeface="Kim jung chul Gothic Regular" panose="020B0503000000000000" pitchFamily="50" charset="-127"/>
-              </a:rPr>
-              <a:t>(</a:t>
-            </a:r>
-            <a:r>
-              <a:rPr lang="en-US" altLang="ko-KR" b="0" dirty="0">
-                <a:solidFill>
-                  <a:srgbClr val="9CDCFE"/>
-                </a:solidFill>
-                <a:effectLst/>
-                <a:latin typeface="Consolas" panose="020B0609020204030204" pitchFamily="49" charset="0"/>
-                <a:ea typeface="Kim jung chul Gothic Regular" panose="020B0503000000000000" pitchFamily="50" charset="-127"/>
-              </a:rPr>
-              <a:t>fruit</a:t>
-            </a:r>
-            <a:r>
-              <a:rPr lang="en-US" altLang="ko-KR" b="0" dirty="0">
-                <a:solidFill>
-                  <a:srgbClr val="D4D4D4"/>
-                </a:solidFill>
-                <a:effectLst/>
-                <a:latin typeface="Consolas" panose="020B0609020204030204" pitchFamily="49" charset="0"/>
-                <a:ea typeface="Kim jung chul Gothic Regular" panose="020B0503000000000000" pitchFamily="50" charset="-127"/>
-              </a:rPr>
-              <a:t>, </a:t>
-            </a:r>
-            <a:r>
-              <a:rPr lang="en-US" altLang="ko-KR" b="0" dirty="0" err="1">
-                <a:solidFill>
-                  <a:srgbClr val="9CDCFE"/>
-                </a:solidFill>
-                <a:effectLst/>
-                <a:latin typeface="Consolas" panose="020B0609020204030204" pitchFamily="49" charset="0"/>
-                <a:ea typeface="Kim jung chul Gothic Regular" panose="020B0503000000000000" pitchFamily="50" charset="-127"/>
-              </a:rPr>
-              <a:t>i</a:t>
-            </a:r>
-            <a:r>
-              <a:rPr lang="en-US" altLang="ko-KR" b="0" dirty="0">
-                <a:solidFill>
-                  <a:srgbClr val="D4D4D4"/>
-                </a:solidFill>
-                <a:effectLst/>
-                <a:latin typeface="Consolas" panose="020B0609020204030204" pitchFamily="49" charset="0"/>
-                <a:ea typeface="Kim jung chul Gothic Regular" panose="020B0503000000000000" pitchFamily="50" charset="-127"/>
-              </a:rPr>
-              <a:t>, </a:t>
-            </a:r>
-            <a:r>
-              <a:rPr lang="en-US" altLang="ko-KR" b="0" dirty="0" err="1">
-                <a:solidFill>
-                  <a:srgbClr val="9CDCFE"/>
-                </a:solidFill>
-                <a:effectLst/>
-                <a:latin typeface="Consolas" panose="020B0609020204030204" pitchFamily="49" charset="0"/>
-                <a:ea typeface="Kim jung chul Gothic Regular" panose="020B0503000000000000" pitchFamily="50" charset="-127"/>
-              </a:rPr>
-              <a:t>arr</a:t>
-            </a:r>
-            <a:r>
-              <a:rPr lang="en-US" altLang="ko-KR" b="0" dirty="0">
-                <a:solidFill>
-                  <a:srgbClr val="D4D4D4"/>
-                </a:solidFill>
-                <a:effectLst/>
-                <a:latin typeface="Consolas" panose="020B0609020204030204" pitchFamily="49" charset="0"/>
-                <a:ea typeface="Kim jung chul Gothic Regular" panose="020B0503000000000000" pitchFamily="50" charset="-127"/>
-              </a:rPr>
-              <a:t>);</a:t>
-            </a:r>
-          </a:p>
-          <a:p>
-            <a:r>
-              <a:rPr lang="en-US" altLang="ko-KR" b="0" dirty="0">
-                <a:solidFill>
-                  <a:srgbClr val="D4D4D4"/>
-                </a:solidFill>
-                <a:effectLst/>
-                <a:latin typeface="Consolas" panose="020B0609020204030204" pitchFamily="49" charset="0"/>
-                <a:ea typeface="Kim jung chul Gothic Regular" panose="020B0503000000000000" pitchFamily="50" charset="-127"/>
-              </a:rPr>
-              <a:t>});</a:t>
-            </a:r>
-          </a:p>
-          <a:p>
-            <a:br>
-              <a:rPr lang="en-US" altLang="ko-KR" b="0" dirty="0">
-                <a:solidFill>
-                  <a:srgbClr val="D4D4D4"/>
-                </a:solidFill>
-                <a:effectLst/>
-                <a:latin typeface="Consolas" panose="020B0609020204030204" pitchFamily="49" charset="0"/>
-                <a:ea typeface="Kim jung chul Gothic Regular" panose="020B0503000000000000" pitchFamily="50" charset="-127"/>
-              </a:rPr>
-            </a:br>
-            <a:r>
-              <a:rPr lang="en-US" altLang="ko-KR" b="0" dirty="0" err="1">
-                <a:solidFill>
-                  <a:srgbClr val="9CDCFE"/>
-                </a:solidFill>
-                <a:effectLst/>
-                <a:latin typeface="Consolas" panose="020B0609020204030204" pitchFamily="49" charset="0"/>
-                <a:ea typeface="Kim jung chul Gothic Regular" panose="020B0503000000000000" pitchFamily="50" charset="-127"/>
-              </a:rPr>
-              <a:t>fruits</a:t>
-            </a:r>
-            <a:r>
-              <a:rPr lang="en-US" altLang="ko-KR" b="0" dirty="0" err="1">
-                <a:solidFill>
-                  <a:srgbClr val="D4D4D4"/>
-                </a:solidFill>
-                <a:effectLst/>
-                <a:latin typeface="Consolas" panose="020B0609020204030204" pitchFamily="49" charset="0"/>
-                <a:ea typeface="Kim jung chul Gothic Regular" panose="020B0503000000000000" pitchFamily="50" charset="-127"/>
-              </a:rPr>
-              <a:t>.</a:t>
-            </a:r>
-            <a:r>
-              <a:rPr lang="en-US" altLang="ko-KR" b="0" dirty="0" err="1">
-                <a:solidFill>
-                  <a:srgbClr val="DCDCAA"/>
-                </a:solidFill>
-                <a:effectLst/>
-                <a:latin typeface="Consolas" panose="020B0609020204030204" pitchFamily="49" charset="0"/>
-                <a:ea typeface="Kim jung chul Gothic Regular" panose="020B0503000000000000" pitchFamily="50" charset="-127"/>
-              </a:rPr>
-              <a:t>forEach</a:t>
-            </a:r>
-            <a:r>
-              <a:rPr lang="en-US" altLang="ko-KR" b="0" dirty="0">
-                <a:solidFill>
-                  <a:srgbClr val="D4D4D4"/>
-                </a:solidFill>
-                <a:effectLst/>
-                <a:latin typeface="Consolas" panose="020B0609020204030204" pitchFamily="49" charset="0"/>
-                <a:ea typeface="Kim jung chul Gothic Regular" panose="020B0503000000000000" pitchFamily="50" charset="-127"/>
-              </a:rPr>
-              <a:t>((</a:t>
-            </a:r>
-            <a:r>
-              <a:rPr lang="en-US" altLang="ko-KR" b="0" dirty="0">
-                <a:solidFill>
-                  <a:srgbClr val="9CDCFE"/>
-                </a:solidFill>
-                <a:effectLst/>
-                <a:latin typeface="Consolas" panose="020B0609020204030204" pitchFamily="49" charset="0"/>
-                <a:ea typeface="Kim jung chul Gothic Regular" panose="020B0503000000000000" pitchFamily="50" charset="-127"/>
-              </a:rPr>
-              <a:t>fruit</a:t>
-            </a:r>
-            <a:r>
-              <a:rPr lang="en-US" altLang="ko-KR" b="0" dirty="0">
-                <a:solidFill>
-                  <a:srgbClr val="D4D4D4"/>
-                </a:solidFill>
-                <a:effectLst/>
-                <a:latin typeface="Consolas" panose="020B0609020204030204" pitchFamily="49" charset="0"/>
-                <a:ea typeface="Kim jung chul Gothic Regular" panose="020B0503000000000000" pitchFamily="50" charset="-127"/>
-              </a:rPr>
-              <a:t>, </a:t>
-            </a:r>
-            <a:r>
-              <a:rPr lang="en-US" altLang="ko-KR" b="0" dirty="0" err="1">
-                <a:solidFill>
-                  <a:srgbClr val="9CDCFE"/>
-                </a:solidFill>
-                <a:effectLst/>
-                <a:latin typeface="Consolas" panose="020B0609020204030204" pitchFamily="49" charset="0"/>
-                <a:ea typeface="Kim jung chul Gothic Regular" panose="020B0503000000000000" pitchFamily="50" charset="-127"/>
-              </a:rPr>
-              <a:t>i</a:t>
-            </a:r>
-            <a:r>
-              <a:rPr lang="en-US" altLang="ko-KR" b="0" dirty="0">
-                <a:solidFill>
-                  <a:srgbClr val="D4D4D4"/>
-                </a:solidFill>
-                <a:effectLst/>
-                <a:latin typeface="Consolas" panose="020B0609020204030204" pitchFamily="49" charset="0"/>
-                <a:ea typeface="Kim jung chul Gothic Regular" panose="020B0503000000000000" pitchFamily="50" charset="-127"/>
-              </a:rPr>
-              <a:t>, </a:t>
-            </a:r>
-            <a:r>
-              <a:rPr lang="en-US" altLang="ko-KR" b="0" dirty="0" err="1">
-                <a:solidFill>
-                  <a:srgbClr val="9CDCFE"/>
-                </a:solidFill>
-                <a:effectLst/>
-                <a:latin typeface="Consolas" panose="020B0609020204030204" pitchFamily="49" charset="0"/>
-                <a:ea typeface="Kim jung chul Gothic Regular" panose="020B0503000000000000" pitchFamily="50" charset="-127"/>
-              </a:rPr>
-              <a:t>arr</a:t>
-            </a:r>
-            <a:r>
-              <a:rPr lang="en-US" altLang="ko-KR" b="0" dirty="0">
-                <a:solidFill>
-                  <a:srgbClr val="D4D4D4"/>
-                </a:solidFill>
-                <a:effectLst/>
-                <a:latin typeface="Consolas" panose="020B0609020204030204" pitchFamily="49" charset="0"/>
-                <a:ea typeface="Kim jung chul Gothic Regular" panose="020B0503000000000000" pitchFamily="50" charset="-127"/>
-              </a:rPr>
-              <a:t>) </a:t>
-            </a:r>
-            <a:r>
-              <a:rPr lang="en-US" altLang="ko-KR" b="0" dirty="0">
-                <a:solidFill>
-                  <a:srgbClr val="569CD6"/>
-                </a:solidFill>
-                <a:effectLst/>
-                <a:latin typeface="Consolas" panose="020B0609020204030204" pitchFamily="49" charset="0"/>
-                <a:ea typeface="Kim jung chul Gothic Regular" panose="020B0503000000000000" pitchFamily="50" charset="-127"/>
-              </a:rPr>
-              <a:t>=&gt;</a:t>
-            </a:r>
-            <a:r>
-              <a:rPr lang="en-US" altLang="ko-KR" b="0" dirty="0">
-                <a:solidFill>
-                  <a:srgbClr val="D4D4D4"/>
-                </a:solidFill>
-                <a:effectLst/>
-                <a:latin typeface="Consolas" panose="020B0609020204030204" pitchFamily="49" charset="0"/>
-                <a:ea typeface="Kim jung chul Gothic Regular" panose="020B0503000000000000" pitchFamily="50" charset="-127"/>
-              </a:rPr>
-              <a:t> {</a:t>
             </a:r>
           </a:p>
           <a:p>
@@ -12809,11 +13284,11 @@
           <a:p>
             <a:r>
               <a:rPr lang="ko-KR" altLang="en-US" dirty="0"/>
-              <a:t>참고 </a:t>
+              <a:t>참고</a:t>
             </a:r>
             <a:r>
               <a:rPr lang="en-US" altLang="ko-KR" dirty="0"/>
-              <a:t>+ for ~ in…</a:t>
+              <a:t>) for ~ in…</a:t>
             </a:r>
             <a:endParaRPr lang="ko-KR" altLang="en-US" dirty="0"/>
           </a:p>
@@ -15224,7 +15699,9 @@
           </a:xfrm>
         </p:spPr>
         <p:txBody>
-          <a:bodyPr/>
+          <a:bodyPr>
+            <a:normAutofit lnSpcReduction="10000"/>
+          </a:bodyPr>
           <a:lstStyle/>
           <a:p>
             <a:r>
@@ -15255,6 +15732,11 @@
             <a:endParaRPr lang="ko-KR" altLang="en-US" dirty="0"/>
           </a:p>
           <a:p>
+            <a:pPr>
+              <a:lnSpc>
+                <a:spcPct val="110000"/>
+              </a:lnSpc>
+            </a:pPr>
             <a:r>
               <a:rPr lang="en-US" altLang="ko-KR" dirty="0" err="1"/>
               <a:t>arr.</a:t>
@@ -15303,6 +15785,9 @@
               <a:rPr lang="en-US" altLang="ko-KR" dirty="0"/>
               <a:t>. </a:t>
             </a:r>
+            <a:br>
+              <a:rPr lang="en-US" altLang="ko-KR" dirty="0"/>
+            </a:br>
             <a:r>
               <a:rPr lang="ko-KR" altLang="en-US" dirty="0"/>
               <a:t>단</a:t>
